--- a/presentations/06_weekly_summary_mamba_vad_en.pptx
+++ b/presentations/06_weekly_summary_mamba_vad_en.pptx
@@ -4,12 +4,15 @@
   <p:sldMasterIdLst>
     <p:sldMasterId id="2147483648" r:id="rId1"/>
   </p:sldMasterIdLst>
+  <p:notesMasterIdLst>
+    <p:notesMasterId r:id="rId18"/>
+  </p:notesMasterIdLst>
   <p:sldIdLst>
     <p:sldId id="256" r:id="rId2"/>
     <p:sldId id="257" r:id="rId3"/>
     <p:sldId id="258" r:id="rId4"/>
     <p:sldId id="259" r:id="rId5"/>
-    <p:sldId id="271" r:id="rId6"/>
+    <p:sldId id="272" r:id="rId6"/>
     <p:sldId id="260" r:id="rId7"/>
     <p:sldId id="261" r:id="rId8"/>
     <p:sldId id="262" r:id="rId9"/>
@@ -138,6 +141,440 @@
 </p:presentation>
 </file>
 
+<file path=ppt/notesMasters/notesMaster1.xml><?xml version="1.0" encoding="utf-8"?>
+<p:notesMaster xmlns:a="http://schemas.openxmlformats.org/drawingml/2006/main" xmlns:r="http://schemas.openxmlformats.org/officeDocument/2006/relationships" xmlns:p="http://schemas.openxmlformats.org/presentationml/2006/main">
+  <p:cSld>
+    <p:bg>
+      <p:bgRef idx="1001">
+        <a:schemeClr val="bg1"/>
+      </p:bgRef>
+    </p:bg>
+    <p:spTree>
+      <p:nvGrpSpPr>
+        <p:cNvPr id="1" name=""/>
+        <p:cNvGrpSpPr/>
+        <p:nvPr/>
+      </p:nvGrpSpPr>
+      <p:grpSpPr>
+        <a:xfrm>
+          <a:off x="0" y="0"/>
+          <a:ext cx="0" cy="0"/>
+          <a:chOff x="0" y="0"/>
+          <a:chExt cx="0" cy="0"/>
+        </a:xfrm>
+      </p:grpSpPr>
+      <p:sp>
+        <p:nvSpPr>
+          <p:cNvPr id="2" name="Marcador de encabezado 1"/>
+          <p:cNvSpPr>
+            <a:spLocks noGrp="1"/>
+          </p:cNvSpPr>
+          <p:nvPr>
+            <p:ph type="hdr" sz="quarter"/>
+          </p:nvPr>
+        </p:nvSpPr>
+        <p:spPr>
+          <a:xfrm>
+            <a:off x="0" y="0"/>
+            <a:ext cx="2971800" cy="458788"/>
+          </a:xfrm>
+          <a:prstGeom prst="rect">
+            <a:avLst/>
+          </a:prstGeom>
+        </p:spPr>
+        <p:txBody>
+          <a:bodyPr vert="horz" lIns="91440" tIns="45720" rIns="91440" bIns="45720" rtlCol="0"/>
+          <a:lstStyle>
+            <a:lvl1pPr algn="l">
+              <a:defRPr sz="1200"/>
+            </a:lvl1pPr>
+          </a:lstStyle>
+          <a:p>
+            <a:endParaRPr kumimoji="1" lang="en-US"/>
+          </a:p>
+        </p:txBody>
+      </p:sp>
+      <p:sp>
+        <p:nvSpPr>
+          <p:cNvPr id="3" name="Marcador de fecha 2"/>
+          <p:cNvSpPr>
+            <a:spLocks noGrp="1"/>
+          </p:cNvSpPr>
+          <p:nvPr>
+            <p:ph type="dt" idx="1"/>
+          </p:nvPr>
+        </p:nvSpPr>
+        <p:spPr>
+          <a:xfrm>
+            <a:off x="3884613" y="0"/>
+            <a:ext cx="2971800" cy="458788"/>
+          </a:xfrm>
+          <a:prstGeom prst="rect">
+            <a:avLst/>
+          </a:prstGeom>
+        </p:spPr>
+        <p:txBody>
+          <a:bodyPr vert="horz" lIns="91440" tIns="45720" rIns="91440" bIns="45720" rtlCol="0"/>
+          <a:lstStyle>
+            <a:lvl1pPr algn="r">
+              <a:defRPr sz="1200"/>
+            </a:lvl1pPr>
+          </a:lstStyle>
+          <a:p>
+            <a:fld id="{6A3C6B71-9F91-4F0D-A82F-6C6408E62C5B}" type="datetimeFigureOut">
+              <a:rPr kumimoji="1" lang="en-US" smtClean="0"/>
+              <a:t>9/26/2026</a:t>
+            </a:fld>
+            <a:endParaRPr kumimoji="1" lang="en-US"/>
+          </a:p>
+        </p:txBody>
+      </p:sp>
+      <p:sp>
+        <p:nvSpPr>
+          <p:cNvPr id="4" name="Marcador de imagen de diapositiva 3"/>
+          <p:cNvSpPr>
+            <a:spLocks noGrp="1" noRot="1" noChangeAspect="1"/>
+          </p:cNvSpPr>
+          <p:nvPr>
+            <p:ph type="sldImg" idx="2"/>
+          </p:nvPr>
+        </p:nvSpPr>
+        <p:spPr>
+          <a:xfrm>
+            <a:off x="685800" y="1143000"/>
+            <a:ext cx="5486400" cy="3086100"/>
+          </a:xfrm>
+          <a:prstGeom prst="rect">
+            <a:avLst/>
+          </a:prstGeom>
+          <a:noFill/>
+          <a:ln w="12700">
+            <a:solidFill>
+              <a:prstClr val="black"/>
+            </a:solidFill>
+          </a:ln>
+        </p:spPr>
+        <p:txBody>
+          <a:bodyPr vert="horz" lIns="91440" tIns="45720" rIns="91440" bIns="45720" rtlCol="0" anchor="ctr"/>
+          <a:lstStyle/>
+          <a:p>
+            <a:endParaRPr lang="en-US"/>
+          </a:p>
+        </p:txBody>
+      </p:sp>
+      <p:sp>
+        <p:nvSpPr>
+          <p:cNvPr id="5" name="Marcador de notas 4"/>
+          <p:cNvSpPr>
+            <a:spLocks noGrp="1"/>
+          </p:cNvSpPr>
+          <p:nvPr>
+            <p:ph type="body" sz="quarter" idx="3"/>
+          </p:nvPr>
+        </p:nvSpPr>
+        <p:spPr>
+          <a:xfrm>
+            <a:off x="685800" y="4400550"/>
+            <a:ext cx="5486400" cy="3600450"/>
+          </a:xfrm>
+          <a:prstGeom prst="rect">
+            <a:avLst/>
+          </a:prstGeom>
+        </p:spPr>
+        <p:txBody>
+          <a:bodyPr vert="horz" lIns="91440" tIns="45720" rIns="91440" bIns="45720" rtlCol="0"/>
+          <a:lstStyle/>
+          <a:p>
+            <a:pPr lvl="0"/>
+            <a:r>
+              <a:rPr kumimoji="1" lang="es-MX"/>
+              <a:t>Haga clic para modificar los estilos de texto del patrón</a:t>
+            </a:r>
+          </a:p>
+          <a:p>
+            <a:pPr lvl="1"/>
+            <a:r>
+              <a:rPr kumimoji="1" lang="es-MX"/>
+              <a:t>Segundo nivel</a:t>
+            </a:r>
+          </a:p>
+          <a:p>
+            <a:pPr lvl="2"/>
+            <a:r>
+              <a:rPr kumimoji="1" lang="es-MX"/>
+              <a:t>Tercer nivel</a:t>
+            </a:r>
+          </a:p>
+          <a:p>
+            <a:pPr lvl="3"/>
+            <a:r>
+              <a:rPr kumimoji="1" lang="es-MX"/>
+              <a:t>Cuarto nivel</a:t>
+            </a:r>
+          </a:p>
+          <a:p>
+            <a:pPr lvl="4"/>
+            <a:r>
+              <a:rPr kumimoji="1" lang="es-MX"/>
+              <a:t>Quinto nivel</a:t>
+            </a:r>
+            <a:endParaRPr kumimoji="1" lang="en-US"/>
+          </a:p>
+        </p:txBody>
+      </p:sp>
+      <p:sp>
+        <p:nvSpPr>
+          <p:cNvPr id="6" name="Marcador de pie de página 5"/>
+          <p:cNvSpPr>
+            <a:spLocks noGrp="1"/>
+          </p:cNvSpPr>
+          <p:nvPr>
+            <p:ph type="ftr" sz="quarter" idx="4"/>
+          </p:nvPr>
+        </p:nvSpPr>
+        <p:spPr>
+          <a:xfrm>
+            <a:off x="0" y="8685213"/>
+            <a:ext cx="2971800" cy="458787"/>
+          </a:xfrm>
+          <a:prstGeom prst="rect">
+            <a:avLst/>
+          </a:prstGeom>
+        </p:spPr>
+        <p:txBody>
+          <a:bodyPr vert="horz" lIns="91440" tIns="45720" rIns="91440" bIns="45720" rtlCol="0" anchor="b"/>
+          <a:lstStyle>
+            <a:lvl1pPr algn="l">
+              <a:defRPr sz="1200"/>
+            </a:lvl1pPr>
+          </a:lstStyle>
+          <a:p>
+            <a:endParaRPr kumimoji="1" lang="en-US"/>
+          </a:p>
+        </p:txBody>
+      </p:sp>
+      <p:sp>
+        <p:nvSpPr>
+          <p:cNvPr id="7" name="Marcador de número de diapositiva 6"/>
+          <p:cNvSpPr>
+            <a:spLocks noGrp="1"/>
+          </p:cNvSpPr>
+          <p:nvPr>
+            <p:ph type="sldNum" sz="quarter" idx="5"/>
+          </p:nvPr>
+        </p:nvSpPr>
+        <p:spPr>
+          <a:xfrm>
+            <a:off x="3884613" y="8685213"/>
+            <a:ext cx="2971800" cy="458787"/>
+          </a:xfrm>
+          <a:prstGeom prst="rect">
+            <a:avLst/>
+          </a:prstGeom>
+        </p:spPr>
+        <p:txBody>
+          <a:bodyPr vert="horz" lIns="91440" tIns="45720" rIns="91440" bIns="45720" rtlCol="0" anchor="b"/>
+          <a:lstStyle>
+            <a:lvl1pPr algn="r">
+              <a:defRPr sz="1200"/>
+            </a:lvl1pPr>
+          </a:lstStyle>
+          <a:p>
+            <a:fld id="{3C8423E1-5CF0-47A8-84E4-4468CEB2B5CE}" type="slidenum">
+              <a:rPr kumimoji="1" lang="en-US" smtClean="0"/>
+              <a:t>‹Nº›</a:t>
+            </a:fld>
+            <a:endParaRPr kumimoji="1" lang="en-US"/>
+          </a:p>
+        </p:txBody>
+      </p:sp>
+    </p:spTree>
+    <p:extLst>
+      <p:ext uri="{BB962C8B-B14F-4D97-AF65-F5344CB8AC3E}">
+        <p14:creationId xmlns:p14="http://schemas.microsoft.com/office/powerpoint/2010/main" val="3631691182"/>
+      </p:ext>
+    </p:extLst>
+  </p:cSld>
+  <p:clrMap bg1="lt1" tx1="dk1" bg2="lt2" tx2="dk2" accent1="accent1" accent2="accent2" accent3="accent3" accent4="accent4" accent5="accent5" accent6="accent6" hlink="hlink" folHlink="folHlink"/>
+  <p:notesStyle>
+    <a:lvl1pPr marL="0" algn="l" defTabSz="914400" rtl="0" eaLnBrk="1" latinLnBrk="0" hangingPunct="1">
+      <a:defRPr kumimoji="1" sz="1200" kern="1200">
+        <a:solidFill>
+          <a:schemeClr val="tx1"/>
+        </a:solidFill>
+        <a:latin typeface="+mn-lt"/>
+        <a:ea typeface="+mn-ea"/>
+        <a:cs typeface="+mn-cs"/>
+      </a:defRPr>
+    </a:lvl1pPr>
+    <a:lvl2pPr marL="457200" algn="l" defTabSz="914400" rtl="0" eaLnBrk="1" latinLnBrk="0" hangingPunct="1">
+      <a:defRPr kumimoji="1" sz="1200" kern="1200">
+        <a:solidFill>
+          <a:schemeClr val="tx1"/>
+        </a:solidFill>
+        <a:latin typeface="+mn-lt"/>
+        <a:ea typeface="+mn-ea"/>
+        <a:cs typeface="+mn-cs"/>
+      </a:defRPr>
+    </a:lvl2pPr>
+    <a:lvl3pPr marL="914400" algn="l" defTabSz="914400" rtl="0" eaLnBrk="1" latinLnBrk="0" hangingPunct="1">
+      <a:defRPr kumimoji="1" sz="1200" kern="1200">
+        <a:solidFill>
+          <a:schemeClr val="tx1"/>
+        </a:solidFill>
+        <a:latin typeface="+mn-lt"/>
+        <a:ea typeface="+mn-ea"/>
+        <a:cs typeface="+mn-cs"/>
+      </a:defRPr>
+    </a:lvl3pPr>
+    <a:lvl4pPr marL="1371600" algn="l" defTabSz="914400" rtl="0" eaLnBrk="1" latinLnBrk="0" hangingPunct="1">
+      <a:defRPr kumimoji="1" sz="1200" kern="1200">
+        <a:solidFill>
+          <a:schemeClr val="tx1"/>
+        </a:solidFill>
+        <a:latin typeface="+mn-lt"/>
+        <a:ea typeface="+mn-ea"/>
+        <a:cs typeface="+mn-cs"/>
+      </a:defRPr>
+    </a:lvl4pPr>
+    <a:lvl5pPr marL="1828800" algn="l" defTabSz="914400" rtl="0" eaLnBrk="1" latinLnBrk="0" hangingPunct="1">
+      <a:defRPr kumimoji="1" sz="1200" kern="1200">
+        <a:solidFill>
+          <a:schemeClr val="tx1"/>
+        </a:solidFill>
+        <a:latin typeface="+mn-lt"/>
+        <a:ea typeface="+mn-ea"/>
+        <a:cs typeface="+mn-cs"/>
+      </a:defRPr>
+    </a:lvl5pPr>
+    <a:lvl6pPr marL="2286000" algn="l" defTabSz="914400" rtl="0" eaLnBrk="1" latinLnBrk="0" hangingPunct="1">
+      <a:defRPr kumimoji="1" sz="1200" kern="1200">
+        <a:solidFill>
+          <a:schemeClr val="tx1"/>
+        </a:solidFill>
+        <a:latin typeface="+mn-lt"/>
+        <a:ea typeface="+mn-ea"/>
+        <a:cs typeface="+mn-cs"/>
+      </a:defRPr>
+    </a:lvl6pPr>
+    <a:lvl7pPr marL="2743200" algn="l" defTabSz="914400" rtl="0" eaLnBrk="1" latinLnBrk="0" hangingPunct="1">
+      <a:defRPr kumimoji="1" sz="1200" kern="1200">
+        <a:solidFill>
+          <a:schemeClr val="tx1"/>
+        </a:solidFill>
+        <a:latin typeface="+mn-lt"/>
+        <a:ea typeface="+mn-ea"/>
+        <a:cs typeface="+mn-cs"/>
+      </a:defRPr>
+    </a:lvl7pPr>
+    <a:lvl8pPr marL="3200400" algn="l" defTabSz="914400" rtl="0" eaLnBrk="1" latinLnBrk="0" hangingPunct="1">
+      <a:defRPr kumimoji="1" sz="1200" kern="1200">
+        <a:solidFill>
+          <a:schemeClr val="tx1"/>
+        </a:solidFill>
+        <a:latin typeface="+mn-lt"/>
+        <a:ea typeface="+mn-ea"/>
+        <a:cs typeface="+mn-cs"/>
+      </a:defRPr>
+    </a:lvl8pPr>
+    <a:lvl9pPr marL="3657600" algn="l" defTabSz="914400" rtl="0" eaLnBrk="1" latinLnBrk="0" hangingPunct="1">
+      <a:defRPr kumimoji="1" sz="1200" kern="1200">
+        <a:solidFill>
+          <a:schemeClr val="tx1"/>
+        </a:solidFill>
+        <a:latin typeface="+mn-lt"/>
+        <a:ea typeface="+mn-ea"/>
+        <a:cs typeface="+mn-cs"/>
+      </a:defRPr>
+    </a:lvl9pPr>
+  </p:notesStyle>
+</p:notesMaster>
+</file>
+
+<file path=ppt/notesSlides/notesSlide1.xml><?xml version="1.0" encoding="utf-8"?>
+<p:notes xmlns:a="http://schemas.openxmlformats.org/drawingml/2006/main" xmlns:r="http://schemas.openxmlformats.org/officeDocument/2006/relationships" xmlns:p="http://schemas.openxmlformats.org/presentationml/2006/main">
+  <p:cSld>
+    <p:spTree>
+      <p:nvGrpSpPr>
+        <p:cNvPr id="1" name=""/>
+        <p:cNvGrpSpPr/>
+        <p:nvPr/>
+      </p:nvGrpSpPr>
+      <p:grpSpPr>
+        <a:xfrm>
+          <a:off x="0" y="0"/>
+          <a:ext cx="0" cy="0"/>
+          <a:chOff x="0" y="0"/>
+          <a:chExt cx="0" cy="0"/>
+        </a:xfrm>
+      </p:grpSpPr>
+      <p:sp>
+        <p:nvSpPr>
+          <p:cNvPr id="2" name="Marcador de imagen de diapositiva 1"/>
+          <p:cNvSpPr>
+            <a:spLocks noGrp="1" noRot="1" noChangeAspect="1"/>
+          </p:cNvSpPr>
+          <p:nvPr>
+            <p:ph type="sldImg"/>
+          </p:nvPr>
+        </p:nvSpPr>
+        <p:spPr/>
+      </p:sp>
+      <p:sp>
+        <p:nvSpPr>
+          <p:cNvPr id="3" name="Marcador de notas 2"/>
+          <p:cNvSpPr>
+            <a:spLocks noGrp="1"/>
+          </p:cNvSpPr>
+          <p:nvPr>
+            <p:ph type="body" idx="1"/>
+          </p:nvPr>
+        </p:nvSpPr>
+        <p:spPr/>
+        <p:txBody>
+          <a:bodyPr/>
+          <a:lstStyle/>
+          <a:p>
+            <a:endParaRPr kumimoji="1" lang="en-US" dirty="0"/>
+          </a:p>
+        </p:txBody>
+      </p:sp>
+      <p:sp>
+        <p:nvSpPr>
+          <p:cNvPr id="4" name="Marcador de número de diapositiva 3"/>
+          <p:cNvSpPr>
+            <a:spLocks noGrp="1"/>
+          </p:cNvSpPr>
+          <p:nvPr>
+            <p:ph type="sldNum" sz="quarter" idx="5"/>
+          </p:nvPr>
+        </p:nvSpPr>
+        <p:spPr/>
+        <p:txBody>
+          <a:bodyPr/>
+          <a:lstStyle/>
+          <a:p>
+            <a:fld id="{3C8423E1-5CF0-47A8-84E4-4468CEB2B5CE}" type="slidenum">
+              <a:rPr kumimoji="1" lang="en-US" smtClean="0"/>
+              <a:t>6</a:t>
+            </a:fld>
+            <a:endParaRPr kumimoji="1" lang="en-US"/>
+          </a:p>
+        </p:txBody>
+      </p:sp>
+    </p:spTree>
+    <p:extLst>
+      <p:ext uri="{BB962C8B-B14F-4D97-AF65-F5344CB8AC3E}">
+        <p14:creationId xmlns:p14="http://schemas.microsoft.com/office/powerpoint/2010/main" val="1687598485"/>
+      </p:ext>
+    </p:extLst>
+  </p:cSld>
+  <p:clrMapOvr>
+    <a:masterClrMapping/>
+  </p:clrMapOvr>
+</p:notes>
+</file>
+
 <file path=ppt/slideLayouts/slideLayout1.xml><?xml version="1.0" encoding="utf-8"?>
 <p:sldLayout xmlns:a="http://schemas.openxmlformats.org/drawingml/2006/main" xmlns:r="http://schemas.openxmlformats.org/officeDocument/2006/relationships" xmlns:p="http://schemas.openxmlformats.org/presentationml/2006/main" type="title" preserve="1">
   <p:cSld name="Title Slide">
@@ -317,7 +754,7 @@
           <a:p>
             <a:fld id="{5BCAD085-E8A6-8845-BD4E-CB4CCA059FC4}" type="datetimeFigureOut">
               <a:rPr lang="en-US" smtClean="0"/>
-              <a:t>9/23/2026</a:t>
+              <a:t>9/26/2026</a:t>
             </a:fld>
             <a:endParaRPr lang="en-US"/>
           </a:p>
@@ -485,7 +922,7 @@
           <a:p>
             <a:fld id="{5BCAD085-E8A6-8845-BD4E-CB4CCA059FC4}" type="datetimeFigureOut">
               <a:rPr lang="en-US" smtClean="0"/>
-              <a:t>9/23/2026</a:t>
+              <a:t>9/26/2026</a:t>
             </a:fld>
             <a:endParaRPr lang="en-US"/>
           </a:p>
@@ -663,7 +1100,7 @@
           <a:p>
             <a:fld id="{5BCAD085-E8A6-8845-BD4E-CB4CCA059FC4}" type="datetimeFigureOut">
               <a:rPr lang="en-US" smtClean="0"/>
-              <a:t>9/23/2026</a:t>
+              <a:t>9/26/2026</a:t>
             </a:fld>
             <a:endParaRPr lang="en-US"/>
           </a:p>
@@ -831,7 +1268,7 @@
           <a:p>
             <a:fld id="{5BCAD085-E8A6-8845-BD4E-CB4CCA059FC4}" type="datetimeFigureOut">
               <a:rPr lang="en-US" smtClean="0"/>
-              <a:t>9/23/2026</a:t>
+              <a:t>9/26/2026</a:t>
             </a:fld>
             <a:endParaRPr lang="en-US"/>
           </a:p>
@@ -1076,7 +1513,7 @@
           <a:p>
             <a:fld id="{5BCAD085-E8A6-8845-BD4E-CB4CCA059FC4}" type="datetimeFigureOut">
               <a:rPr lang="en-US" smtClean="0"/>
-              <a:t>9/23/2026</a:t>
+              <a:t>9/26/2026</a:t>
             </a:fld>
             <a:endParaRPr lang="en-US"/>
           </a:p>
@@ -1361,7 +1798,7 @@
           <a:p>
             <a:fld id="{5BCAD085-E8A6-8845-BD4E-CB4CCA059FC4}" type="datetimeFigureOut">
               <a:rPr lang="en-US" smtClean="0"/>
-              <a:t>9/23/2026</a:t>
+              <a:t>9/26/2026</a:t>
             </a:fld>
             <a:endParaRPr lang="en-US"/>
           </a:p>
@@ -1780,7 +2217,7 @@
           <a:p>
             <a:fld id="{5BCAD085-E8A6-8845-BD4E-CB4CCA059FC4}" type="datetimeFigureOut">
               <a:rPr lang="en-US" smtClean="0"/>
-              <a:t>9/23/2026</a:t>
+              <a:t>9/26/2026</a:t>
             </a:fld>
             <a:endParaRPr lang="en-US"/>
           </a:p>
@@ -1897,7 +2334,7 @@
           <a:p>
             <a:fld id="{5BCAD085-E8A6-8845-BD4E-CB4CCA059FC4}" type="datetimeFigureOut">
               <a:rPr lang="en-US" smtClean="0"/>
-              <a:t>9/23/2026</a:t>
+              <a:t>9/26/2026</a:t>
             </a:fld>
             <a:endParaRPr lang="en-US"/>
           </a:p>
@@ -1992,7 +2429,7 @@
           <a:p>
             <a:fld id="{5BCAD085-E8A6-8845-BD4E-CB4CCA059FC4}" type="datetimeFigureOut">
               <a:rPr lang="en-US" smtClean="0"/>
-              <a:t>9/23/2026</a:t>
+              <a:t>9/26/2026</a:t>
             </a:fld>
             <a:endParaRPr lang="en-US"/>
           </a:p>
@@ -2267,7 +2704,7 @@
           <a:p>
             <a:fld id="{5BCAD085-E8A6-8845-BD4E-CB4CCA059FC4}" type="datetimeFigureOut">
               <a:rPr lang="en-US" smtClean="0"/>
-              <a:t>9/23/2026</a:t>
+              <a:t>9/26/2026</a:t>
             </a:fld>
             <a:endParaRPr lang="en-US"/>
           </a:p>
@@ -2519,7 +2956,7 @@
           <a:p>
             <a:fld id="{5BCAD085-E8A6-8845-BD4E-CB4CCA059FC4}" type="datetimeFigureOut">
               <a:rPr lang="en-US" smtClean="0"/>
-              <a:t>9/23/2026</a:t>
+              <a:t>9/26/2026</a:t>
             </a:fld>
             <a:endParaRPr lang="en-US"/>
           </a:p>
@@ -2730,7 +3167,7 @@
           <a:p>
             <a:fld id="{5BCAD085-E8A6-8845-BD4E-CB4CCA059FC4}" type="datetimeFigureOut">
               <a:rPr lang="en-US" smtClean="0"/>
-              <a:t>9/23/2026</a:t>
+              <a:t>9/26/2026</a:t>
             </a:fld>
             <a:endParaRPr lang="en-US"/>
           </a:p>
@@ -3155,7 +3592,7 @@
           <a:lstStyle/>
           <a:p>
             <a:pPr algn="ctr"/>
-            <a:endParaRPr/>
+            <a:endParaRPr lang="en-US" noProof="0" dirty="0"/>
           </a:p>
         </p:txBody>
       </p:sp>
@@ -3190,6 +3627,7 @@
               </a:defRPr>
             </a:pPr>
             <a:r>
+              <a:rPr lang="en-US" noProof="0" dirty="0"/>
               <a:t>Weekly Progress Summary</a:t>
             </a:r>
           </a:p>
@@ -3226,7 +3664,7 @@
               </a:defRPr>
             </a:pPr>
             <a:r>
-              <a:rPr dirty="0"/>
+              <a:rPr lang="en-US" noProof="0" dirty="0"/>
               <a:t>Mamba-based video anomaly detection</a:t>
             </a:r>
           </a:p>
@@ -3274,7 +3712,7 @@
           <a:lstStyle/>
           <a:p>
             <a:pPr algn="ctr"/>
-            <a:endParaRPr/>
+            <a:endParaRPr lang="en-US" noProof="0" dirty="0"/>
           </a:p>
         </p:txBody>
       </p:sp>
@@ -3312,15 +3750,15 @@
               </a:defRPr>
             </a:pPr>
             <a:r>
-              <a:rPr dirty="0"/>
+              <a:rPr lang="en-US" noProof="0" dirty="0"/>
               <a:t>Started the </a:t>
             </a:r>
             <a:r>
-              <a:rPr b="1" dirty="0"/>
+              <a:rPr lang="en-US" b="1" noProof="0" dirty="0"/>
               <a:t>Mamba-for-VAD</a:t>
             </a:r>
             <a:r>
-              <a:rPr dirty="0"/>
+              <a:rPr lang="en-US" noProof="0" dirty="0"/>
               <a:t> block after the general Video Mamba foundation.</a:t>
             </a:r>
           </a:p>
@@ -3337,23 +3775,23 @@
               </a:defRPr>
             </a:pPr>
             <a:r>
-              <a:rPr dirty="0"/>
+              <a:rPr lang="en-US" noProof="0" dirty="0"/>
               <a:t>Reviewed </a:t>
             </a:r>
             <a:r>
-              <a:rPr b="1" dirty="0"/>
+              <a:rPr lang="en-US" b="1" noProof="0" dirty="0"/>
               <a:t>unsupervised</a:t>
             </a:r>
             <a:r>
-              <a:rPr dirty="0"/>
+              <a:rPr lang="en-US" noProof="0" dirty="0"/>
               <a:t> </a:t>
             </a:r>
             <a:r>
-              <a:rPr b="1" dirty="0"/>
+              <a:rPr lang="en-US" b="1" noProof="0" dirty="0"/>
               <a:t>VAD</a:t>
             </a:r>
             <a:r>
-              <a:rPr dirty="0"/>
+              <a:rPr lang="en-US" noProof="0" dirty="0"/>
               <a:t> papers that use Mamba as an efficient temporal backbone.</a:t>
             </a:r>
           </a:p>
@@ -3370,27 +3808,27 @@
               </a:defRPr>
             </a:pPr>
             <a:r>
-              <a:rPr b="1" dirty="0"/>
+              <a:rPr lang="en-US" b="1" noProof="0" dirty="0"/>
               <a:t>Connected</a:t>
             </a:r>
             <a:r>
-              <a:rPr dirty="0"/>
+              <a:rPr lang="en-US" noProof="0" dirty="0"/>
               <a:t> the Mamba line back </a:t>
             </a:r>
             <a:r>
-              <a:rPr b="1" dirty="0"/>
+              <a:rPr lang="en-US" b="1" noProof="0" dirty="0"/>
               <a:t>to</a:t>
             </a:r>
             <a:r>
-              <a:rPr dirty="0"/>
+              <a:rPr lang="en-US" noProof="0" dirty="0"/>
               <a:t> </a:t>
             </a:r>
             <a:r>
-              <a:rPr b="1" dirty="0"/>
+              <a:rPr lang="en-US" b="1" noProof="0" dirty="0"/>
               <a:t>WSVAD</a:t>
             </a:r>
             <a:r>
-              <a:rPr dirty="0"/>
+              <a:rPr lang="en-US" noProof="0" dirty="0"/>
               <a:t> through multilingual prompt-guided learning.</a:t>
             </a:r>
           </a:p>
@@ -3460,6 +3898,7 @@
               </a:defRPr>
             </a:pPr>
             <a:r>
+              <a:rPr lang="en-US" noProof="0" dirty="0"/>
               <a:t>VADMamba++</a:t>
             </a:r>
           </a:p>
@@ -3499,6 +3938,7 @@
               </a:defRPr>
             </a:pPr>
             <a:r>
+              <a:rPr lang="en-US" noProof="0" dirty="0"/>
               <a:t>VADMamba++ changes the proxy task rather than only changing the architecture.</a:t>
             </a:r>
           </a:p>
@@ -3515,6 +3955,7 @@
               </a:defRPr>
             </a:pPr>
             <a:r>
+              <a:rPr lang="en-US" noProof="0" dirty="0"/>
               <a:t>It replaces RGB-to-RGB reconstruction with Gray-to-RGB reasoning.</a:t>
             </a:r>
           </a:p>
@@ -3531,6 +3972,7 @@
               </a:defRPr>
             </a:pPr>
             <a:r>
+              <a:rPr lang="en-US" noProof="0" dirty="0"/>
               <a:t>The model receives grayscale frames and predicts plausible RGB frames.</a:t>
             </a:r>
           </a:p>
@@ -3547,6 +3989,7 @@
               </a:defRPr>
             </a:pPr>
             <a:r>
+              <a:rPr lang="en-US" noProof="0" dirty="0"/>
               <a:t>This removes optical flow and converts the pipeline into a single-task framework.</a:t>
             </a:r>
           </a:p>
@@ -3596,7 +4039,7 @@
           <a:lstStyle/>
           <a:p>
             <a:pPr algn="ctr"/>
-            <a:endParaRPr/>
+            <a:endParaRPr lang="en-US" noProof="0" dirty="0"/>
           </a:p>
         </p:txBody>
       </p:sp>
@@ -3631,6 +4074,7 @@
               </a:defRPr>
             </a:pPr>
             <a:r>
+              <a:rPr lang="en-US" noProof="0" dirty="0"/>
               <a:t>Gray-to-RGB</a:t>
             </a:r>
           </a:p>
@@ -3667,6 +4111,7 @@
               </a:defRPr>
             </a:pPr>
             <a:r>
+              <a:rPr lang="en-US" noProof="0" dirty="0"/>
               <a:t>The anomaly signal comes from both structural geometry errors and chromatic appearance errors.</a:t>
             </a:r>
           </a:p>
@@ -3736,6 +4181,7 @@
               </a:defRPr>
             </a:pPr>
             <a:r>
+              <a:rPr lang="en-US" noProof="0" dirty="0"/>
               <a:t>VADMamba++: Hybrid Modeling</a:t>
             </a:r>
           </a:p>
@@ -3785,7 +4231,7 @@
           <a:lstStyle/>
           <a:p>
             <a:pPr algn="ctr"/>
-            <a:endParaRPr/>
+            <a:endParaRPr lang="en-US" noProof="0" dirty="0"/>
           </a:p>
         </p:txBody>
       </p:sp>
@@ -3833,7 +4279,7 @@
           <a:lstStyle/>
           <a:p>
             <a:pPr algn="ctr"/>
-            <a:endParaRPr/>
+            <a:endParaRPr lang="en-US" noProof="0" dirty="0"/>
           </a:p>
         </p:txBody>
       </p:sp>
@@ -3881,7 +4327,7 @@
           <a:lstStyle/>
           <a:p>
             <a:pPr algn="ctr"/>
-            <a:endParaRPr/>
+            <a:endParaRPr lang="en-US" noProof="0" dirty="0"/>
           </a:p>
         </p:txBody>
       </p:sp>
@@ -3916,6 +4362,7 @@
               </a:defRPr>
             </a:pPr>
             <a:r>
+              <a:rPr lang="en-US" noProof="0" dirty="0"/>
               <a:t>Transformer</a:t>
             </a:r>
           </a:p>
@@ -3952,6 +4399,7 @@
               </a:defRPr>
             </a:pPr>
             <a:r>
+              <a:rPr lang="en-US" noProof="0" dirty="0"/>
               <a:t>Global context modeling.</a:t>
             </a:r>
           </a:p>
@@ -3988,6 +4436,7 @@
               </a:defRPr>
             </a:pPr>
             <a:r>
+              <a:rPr lang="en-US" noProof="0" dirty="0"/>
               <a:t>Mamba</a:t>
             </a:r>
           </a:p>
@@ -4024,6 +4473,7 @@
               </a:defRPr>
             </a:pPr>
             <a:r>
+              <a:rPr lang="en-US" noProof="0" dirty="0"/>
               <a:t>Long-range temporal dependencies.</a:t>
             </a:r>
           </a:p>
@@ -4060,6 +4510,7 @@
               </a:defRPr>
             </a:pPr>
             <a:r>
+              <a:rPr lang="en-US" noProof="0" dirty="0"/>
               <a:t>CNN</a:t>
             </a:r>
           </a:p>
@@ -4096,6 +4547,7 @@
               </a:defRPr>
             </a:pPr>
             <a:r>
+              <a:rPr lang="en-US" noProof="0" dirty="0"/>
               <a:t>Local spatial refinement.</a:t>
             </a:r>
           </a:p>
@@ -4135,6 +4587,7 @@
               </a:defRPr>
             </a:pPr>
             <a:r>
+              <a:rPr lang="en-US" noProof="0" dirty="0"/>
               <a:t>The best encoder order is coarse-to-fine: Transformer, then Mamba, then CNN.</a:t>
             </a:r>
           </a:p>
@@ -4204,6 +4657,7 @@
               </a:defRPr>
             </a:pPr>
             <a:r>
+              <a:rPr lang="en-US" noProof="0" dirty="0"/>
               <a:t>Results Pattern</a:t>
             </a:r>
           </a:p>
@@ -4243,6 +4697,7 @@
               </a:defRPr>
             </a:pPr>
             <a:r>
+              <a:rPr lang="en-US" noProof="0" dirty="0"/>
               <a:t>VADMamba proves that selective SSMs can be effective for unsupervised VAD.</a:t>
             </a:r>
           </a:p>
@@ -4259,6 +4714,7 @@
               </a:defRPr>
             </a:pPr>
             <a:r>
+              <a:rPr lang="en-US" noProof="0" dirty="0"/>
               <a:t>STNMamba improves spatial-temporal learning while remaining lightweight.</a:t>
             </a:r>
           </a:p>
@@ -4275,6 +4731,7 @@
               </a:defRPr>
             </a:pPr>
             <a:r>
+              <a:rPr lang="en-US" noProof="0" dirty="0"/>
               <a:t>M2S2L improves accuracy by specializing scale and modality representations.</a:t>
             </a:r>
           </a:p>
@@ -4291,6 +4748,7 @@
               </a:defRPr>
             </a:pPr>
             <a:r>
+              <a:rPr lang="en-US" noProof="0" dirty="0"/>
               <a:t>VADMamba++ improves the accuracy-speed trade-off with Gray-to-RGB and no optical flow.</a:t>
             </a:r>
           </a:p>
@@ -4340,7 +4798,7 @@
           <a:lstStyle/>
           <a:p>
             <a:pPr algn="ctr"/>
-            <a:endParaRPr/>
+            <a:endParaRPr lang="en-US" noProof="0" dirty="0"/>
           </a:p>
         </p:txBody>
       </p:sp>
@@ -4388,7 +4846,7 @@
           <a:lstStyle/>
           <a:p>
             <a:pPr algn="ctr"/>
-            <a:endParaRPr/>
+            <a:endParaRPr lang="en-US" noProof="0" dirty="0"/>
           </a:p>
         </p:txBody>
       </p:sp>
@@ -4436,7 +4894,7 @@
           <a:lstStyle/>
           <a:p>
             <a:pPr algn="ctr"/>
-            <a:endParaRPr/>
+            <a:endParaRPr lang="en-US" noProof="0" dirty="0"/>
           </a:p>
         </p:txBody>
       </p:sp>
@@ -4484,7 +4942,7 @@
           <a:lstStyle/>
           <a:p>
             <a:pPr algn="ctr"/>
-            <a:endParaRPr/>
+            <a:endParaRPr lang="en-US" noProof="0" dirty="0"/>
           </a:p>
         </p:txBody>
       </p:sp>
@@ -4519,6 +4977,7 @@
               </a:defRPr>
             </a:pPr>
             <a:r>
+              <a:rPr lang="en-US" noProof="0" dirty="0"/>
               <a:t>Backbone</a:t>
             </a:r>
           </a:p>
@@ -4555,6 +5014,7 @@
               </a:defRPr>
             </a:pPr>
             <a:r>
+              <a:rPr lang="en-US" noProof="0" dirty="0"/>
               <a:t>Architecture</a:t>
             </a:r>
           </a:p>
@@ -4591,6 +5051,7 @@
               </a:defRPr>
             </a:pPr>
             <a:r>
+              <a:rPr lang="en-US" noProof="0" dirty="0"/>
               <a:t>Scale</a:t>
             </a:r>
           </a:p>
@@ -4627,6 +5088,7 @@
               </a:defRPr>
             </a:pPr>
             <a:r>
+              <a:rPr lang="en-US" noProof="0" dirty="0"/>
               <a:t>Proxy task</a:t>
             </a:r>
           </a:p>
@@ -4696,6 +5158,7 @@
               </a:defRPr>
             </a:pPr>
             <a:r>
+              <a:rPr lang="en-US" noProof="0" dirty="0"/>
               <a:t>Multilingual Prompt-Guided WSVAD</a:t>
             </a:r>
           </a:p>
@@ -4735,6 +5198,7 @@
               </a:defRPr>
             </a:pPr>
             <a:r>
+              <a:rPr lang="en-US" noProof="0" dirty="0"/>
               <a:t>The final paper returns to the weakly supervised setting.</a:t>
             </a:r>
           </a:p>
@@ -4751,6 +5215,7 @@
               </a:defRPr>
             </a:pPr>
             <a:r>
+              <a:rPr lang="en-US" noProof="0" dirty="0"/>
               <a:t>It extends CLIP-style WSVAD with multilingual prompt pools.</a:t>
             </a:r>
           </a:p>
@@ -4767,6 +5232,7 @@
               </a:defRPr>
             </a:pPr>
             <a:r>
+              <a:rPr lang="en-US" noProof="0" dirty="0"/>
               <a:t>Adaptive Top-K selection chooses the most useful prompts for each video snippet.</a:t>
             </a:r>
           </a:p>
@@ -4783,6 +5249,7 @@
               </a:defRPr>
             </a:pPr>
             <a:r>
+              <a:rPr lang="en-US" noProof="0" dirty="0"/>
               <a:t>Mamba and Transformer are combined for multi-granularity temporal modeling.</a:t>
             </a:r>
           </a:p>
@@ -4832,7 +5299,7 @@
           <a:lstStyle/>
           <a:p>
             <a:pPr algn="ctr"/>
-            <a:endParaRPr/>
+            <a:endParaRPr lang="en-US" noProof="0" dirty="0"/>
           </a:p>
         </p:txBody>
       </p:sp>
@@ -4867,6 +5334,7 @@
               </a:defRPr>
             </a:pPr>
             <a:r>
+              <a:rPr lang="en-US" noProof="0" dirty="0"/>
               <a:t>Bridge to WSVAD</a:t>
             </a:r>
           </a:p>
@@ -4903,6 +5371,7 @@
               </a:defRPr>
             </a:pPr>
             <a:r>
+              <a:rPr lang="en-US" noProof="0" dirty="0"/>
               <a:t>Here Mamba is not the whole VAD paradigm. It is a temporal reasoning module inside a CLIP and prompt-guided pipeline.</a:t>
             </a:r>
           </a:p>
@@ -4972,6 +5441,7 @@
               </a:defRPr>
             </a:pPr>
             <a:r>
+              <a:rPr lang="en-US" noProof="0" dirty="0"/>
               <a:t>Evolution of Ideas</a:t>
             </a:r>
           </a:p>
@@ -5021,7 +5491,7 @@
           <a:lstStyle/>
           <a:p>
             <a:pPr algn="ctr"/>
-            <a:endParaRPr/>
+            <a:endParaRPr lang="en-US" noProof="0" dirty="0"/>
           </a:p>
         </p:txBody>
       </p:sp>
@@ -5069,7 +5539,7 @@
           <a:lstStyle/>
           <a:p>
             <a:pPr algn="ctr"/>
-            <a:endParaRPr/>
+            <a:endParaRPr lang="en-US" noProof="0" dirty="0"/>
           </a:p>
         </p:txBody>
       </p:sp>
@@ -5117,7 +5587,7 @@
           <a:lstStyle/>
           <a:p>
             <a:pPr algn="ctr"/>
-            <a:endParaRPr/>
+            <a:endParaRPr lang="en-US" noProof="0" dirty="0"/>
           </a:p>
         </p:txBody>
       </p:sp>
@@ -5165,7 +5635,7 @@
           <a:lstStyle/>
           <a:p>
             <a:pPr algn="ctr"/>
-            <a:endParaRPr/>
+            <a:endParaRPr lang="en-US" noProof="0" dirty="0"/>
           </a:p>
         </p:txBody>
       </p:sp>
@@ -5213,7 +5683,7 @@
           <a:lstStyle/>
           <a:p>
             <a:pPr algn="ctr"/>
-            <a:endParaRPr/>
+            <a:endParaRPr lang="en-US" noProof="0" dirty="0"/>
           </a:p>
         </p:txBody>
       </p:sp>
@@ -5248,6 +5718,7 @@
               </a:defRPr>
             </a:pPr>
             <a:r>
+              <a:rPr lang="en-US" noProof="0" dirty="0"/>
               <a:t>VADMamba</a:t>
             </a:r>
           </a:p>
@@ -5284,6 +5755,7 @@
               </a:defRPr>
             </a:pPr>
             <a:r>
+              <a:rPr lang="en-US" noProof="0" dirty="0"/>
               <a:t>STNMamba</a:t>
             </a:r>
           </a:p>
@@ -5320,6 +5792,7 @@
               </a:defRPr>
             </a:pPr>
             <a:r>
+              <a:rPr lang="en-US" noProof="0" dirty="0"/>
               <a:t>M2S2L</a:t>
             </a:r>
           </a:p>
@@ -5356,6 +5829,7 @@
               </a:defRPr>
             </a:pPr>
             <a:r>
+              <a:rPr lang="en-US" noProof="0" dirty="0"/>
               <a:t>VADM++</a:t>
             </a:r>
           </a:p>
@@ -5392,6 +5866,7 @@
               </a:defRPr>
             </a:pPr>
             <a:r>
+              <a:rPr lang="en-US" noProof="0" dirty="0"/>
               <a:t>Multilingual WSVAD</a:t>
             </a:r>
           </a:p>
@@ -5431,6 +5906,7 @@
               </a:defRPr>
             </a:pPr>
             <a:r>
+              <a:rPr lang="en-US" noProof="0" dirty="0"/>
               <a:t>From Mamba as an efficient temporal backbone.</a:t>
             </a:r>
           </a:p>
@@ -5447,6 +5923,7 @@
               </a:defRPr>
             </a:pPr>
             <a:r>
+              <a:rPr lang="en-US" noProof="0" dirty="0"/>
               <a:t>To spatial-temporal normality learning with memory.</a:t>
             </a:r>
           </a:p>
@@ -5463,6 +5940,7 @@
               </a:defRPr>
             </a:pPr>
             <a:r>
+              <a:rPr lang="en-US" noProof="0" dirty="0"/>
               <a:t>To multi-scale and modality-specialized reconstruction.</a:t>
             </a:r>
           </a:p>
@@ -5479,6 +5957,7 @@
               </a:defRPr>
             </a:pPr>
             <a:r>
+              <a:rPr lang="en-US" noProof="0" dirty="0"/>
               <a:t>To simpler proxy tasks and better deployment efficiency.</a:t>
             </a:r>
           </a:p>
@@ -5495,6 +5974,7 @@
               </a:defRPr>
             </a:pPr>
             <a:r>
+              <a:rPr lang="en-US" noProof="0" dirty="0"/>
               <a:t>To CLIP, multilingual prompts, and weakly supervised localization.</a:t>
             </a:r>
           </a:p>
@@ -5564,6 +6044,7 @@
               </a:defRPr>
             </a:pPr>
             <a:r>
+              <a:rPr lang="en-US" noProof="0" dirty="0"/>
               <a:t>What Is Already in Place</a:t>
             </a:r>
           </a:p>
@@ -5603,6 +6084,7 @@
               </a:defRPr>
             </a:pPr>
             <a:r>
+              <a:rPr lang="en-US" noProof="0" dirty="0"/>
               <a:t>A clear distinction between unsupervised VAD and WSVAD evaluation protocols.</a:t>
             </a:r>
           </a:p>
@@ -5619,6 +6101,7 @@
               </a:defRPr>
             </a:pPr>
             <a:r>
+              <a:rPr lang="en-US" noProof="0" dirty="0"/>
               <a:t>A map of how Mamba enters VAD: backbone, spatial-temporal fusion, memory, and prompt-guided temporal modeling.</a:t>
             </a:r>
           </a:p>
@@ -5635,6 +6118,7 @@
               </a:defRPr>
             </a:pPr>
             <a:r>
+              <a:rPr lang="en-US" noProof="0" dirty="0"/>
               <a:t>A comparison of architectural improvements versus proxy-task improvements.</a:t>
             </a:r>
           </a:p>
@@ -5651,6 +6135,7 @@
               </a:defRPr>
             </a:pPr>
             <a:r>
+              <a:rPr lang="en-US" noProof="0" dirty="0"/>
               <a:t>A bridge from reconstruction-based Mamba papers back to the main weakly supervised research direction.</a:t>
             </a:r>
           </a:p>
@@ -5720,6 +6205,7 @@
               </a:defRPr>
             </a:pPr>
             <a:r>
+              <a:rPr lang="en-US" noProof="0" dirty="0"/>
               <a:t>Suggested Next Step</a:t>
             </a:r>
           </a:p>
@@ -5759,6 +6245,7 @@
               </a:defRPr>
             </a:pPr>
             <a:r>
+              <a:rPr lang="en-US" noProof="0" dirty="0"/>
               <a:t>Build a comparison matrix separating unsupervised VAD from WSVAD methods.</a:t>
             </a:r>
           </a:p>
@@ -5775,6 +6262,7 @@
               </a:defRPr>
             </a:pPr>
             <a:r>
+              <a:rPr lang="en-US" noProof="0" dirty="0"/>
               <a:t>For each method, record supervision type, backbone, temporal module, anomaly score, datasets, and metrics.</a:t>
             </a:r>
           </a:p>
@@ -5791,6 +6279,7 @@
               </a:defRPr>
             </a:pPr>
             <a:r>
+              <a:rPr lang="en-US" noProof="0" dirty="0"/>
               <a:t>Decide whether the PhD direction should use Mamba as a full backbone or as a temporal module inside a CLIP/WSVAD pipeline.</a:t>
             </a:r>
           </a:p>
@@ -5807,6 +6296,7 @@
               </a:defRPr>
             </a:pPr>
             <a:r>
+              <a:rPr lang="en-US" noProof="0" dirty="0"/>
               <a:t>Use that decision to define the first implementation target and baseline set.</a:t>
             </a:r>
           </a:p>
@@ -5876,6 +6366,7 @@
               </a:defRPr>
             </a:pPr>
             <a:r>
+              <a:rPr lang="en-US" noProof="0" dirty="0"/>
               <a:t>Narrative of the Work</a:t>
             </a:r>
           </a:p>
@@ -5915,7 +6406,7 @@
               </a:defRPr>
             </a:pPr>
             <a:r>
-              <a:rPr dirty="0"/>
+              <a:rPr lang="en-US" noProof="0" dirty="0"/>
               <a:t>The previous block established why Mamba is attractive for long video sequences.</a:t>
             </a:r>
           </a:p>
@@ -5932,15 +6423,15 @@
               </a:defRPr>
             </a:pPr>
             <a:r>
-              <a:rPr dirty="0"/>
+              <a:rPr lang="en-US" noProof="0" dirty="0"/>
               <a:t>This block asks a more specific question: </a:t>
             </a:r>
             <a:r>
-              <a:rPr b="1" dirty="0"/>
+              <a:rPr lang="en-US" b="1" noProof="0" dirty="0"/>
               <a:t>how is Mamba used in video anomaly detection</a:t>
             </a:r>
             <a:r>
-              <a:rPr dirty="0"/>
+              <a:rPr lang="en-US" noProof="0" dirty="0"/>
               <a:t>?</a:t>
             </a:r>
           </a:p>
@@ -5957,15 +6448,15 @@
               </a:defRPr>
             </a:pPr>
             <a:r>
-              <a:rPr dirty="0"/>
+              <a:rPr lang="en-US" noProof="0" dirty="0"/>
               <a:t>The first papers are mostly </a:t>
             </a:r>
             <a:r>
-              <a:rPr b="1" dirty="0"/>
+              <a:rPr lang="en-US" b="1" noProof="0" dirty="0"/>
               <a:t>unsupervised</a:t>
             </a:r>
             <a:r>
-              <a:rPr dirty="0"/>
+              <a:rPr lang="en-US" noProof="0" dirty="0"/>
               <a:t>: they learn normality and detect deviations.</a:t>
             </a:r>
           </a:p>
@@ -5982,19 +6473,19 @@
               </a:defRPr>
             </a:pPr>
             <a:r>
-              <a:rPr b="1" dirty="0"/>
+              <a:rPr lang="en-US" b="1" noProof="0" dirty="0"/>
               <a:t>The final paper reconnects</a:t>
             </a:r>
             <a:r>
-              <a:rPr dirty="0"/>
+              <a:rPr lang="en-US" noProof="0" dirty="0"/>
               <a:t> the discussion to </a:t>
             </a:r>
             <a:r>
-              <a:rPr b="1" dirty="0"/>
+              <a:rPr lang="en-US" b="1" noProof="0" dirty="0"/>
               <a:t>weak supervision</a:t>
             </a:r>
             <a:r>
-              <a:rPr dirty="0"/>
+              <a:rPr lang="en-US" noProof="0" dirty="0"/>
               <a:t>, CLIP, prompts, and temporal reasoning.</a:t>
             </a:r>
           </a:p>
@@ -6064,6 +6555,7 @@
               </a:defRPr>
             </a:pPr>
             <a:r>
+              <a:rPr lang="en-US" noProof="0" dirty="0"/>
               <a:t>Why This Step Matters</a:t>
             </a:r>
           </a:p>
@@ -6103,7 +6595,7 @@
               </a:defRPr>
             </a:pPr>
             <a:r>
-              <a:rPr dirty="0"/>
+              <a:rPr lang="en-US" noProof="0" dirty="0"/>
               <a:t>VAD requires temporal memory because anomalies may unfold slowly or appear briefly.</a:t>
             </a:r>
           </a:p>
@@ -6120,7 +6612,7 @@
               </a:defRPr>
             </a:pPr>
             <a:r>
-              <a:rPr dirty="0"/>
+              <a:rPr lang="en-US" noProof="0" dirty="0"/>
               <a:t>Transformers provide global reasoning but can be expensive for long surveillance videos.</a:t>
             </a:r>
           </a:p>
@@ -6137,7 +6629,7 @@
               </a:defRPr>
             </a:pPr>
             <a:r>
-              <a:rPr dirty="0"/>
+              <a:rPr lang="en-US" noProof="0" dirty="0"/>
               <a:t>Mamba offers linear-time sequence modeling and a practical path for long-range temporal context.</a:t>
             </a:r>
           </a:p>
@@ -6154,15 +6646,15 @@
               </a:defRPr>
             </a:pPr>
             <a:r>
-              <a:rPr dirty="0"/>
+              <a:rPr lang="en-US" noProof="0" dirty="0"/>
               <a:t>The key </a:t>
             </a:r>
             <a:r>
-              <a:rPr b="1" dirty="0"/>
+              <a:rPr lang="en-US" b="1" noProof="0" dirty="0"/>
               <a:t>is deciding whether Mamba should replace, complement, or simply strengthen existing VAD pipelines</a:t>
             </a:r>
             <a:r>
-              <a:rPr dirty="0"/>
+              <a:rPr lang="en-US" noProof="0" dirty="0"/>
               <a:t>.</a:t>
             </a:r>
           </a:p>
@@ -6212,7 +6704,7 @@
           <a:lstStyle/>
           <a:p>
             <a:pPr algn="ctr"/>
-            <a:endParaRPr/>
+            <a:endParaRPr lang="en-US" noProof="0" dirty="0"/>
           </a:p>
         </p:txBody>
       </p:sp>
@@ -6247,6 +6739,7 @@
               </a:defRPr>
             </a:pPr>
             <a:r>
+              <a:rPr lang="en-US" noProof="0" dirty="0"/>
               <a:t>Key Idea</a:t>
             </a:r>
           </a:p>
@@ -6283,7 +6776,7 @@
               </a:defRPr>
             </a:pPr>
             <a:r>
-              <a:rPr dirty="0"/>
+              <a:rPr lang="en-US" noProof="0" dirty="0"/>
               <a:t>The work shifts from understanding Mamba as a video backbone to evaluating Mamba as a VAD design choice.</a:t>
             </a:r>
           </a:p>
@@ -6353,6 +6846,7 @@
               </a:defRPr>
             </a:pPr>
             <a:r>
+              <a:rPr lang="en-US" noProof="0" dirty="0"/>
               <a:t>Two VAD Directions</a:t>
             </a:r>
           </a:p>
@@ -6402,7 +6896,7 @@
           <a:lstStyle/>
           <a:p>
             <a:pPr algn="ctr"/>
-            <a:endParaRPr/>
+            <a:endParaRPr lang="en-US" noProof="0" dirty="0"/>
           </a:p>
         </p:txBody>
       </p:sp>
@@ -6450,7 +6944,7 @@
           <a:lstStyle/>
           <a:p>
             <a:pPr algn="ctr"/>
-            <a:endParaRPr/>
+            <a:endParaRPr lang="en-US" noProof="0" dirty="0"/>
           </a:p>
         </p:txBody>
       </p:sp>
@@ -6485,6 +6979,7 @@
               </a:defRPr>
             </a:pPr>
             <a:r>
+              <a:rPr lang="en-US" noProof="0" dirty="0"/>
               <a:t>Unsupervised VAD</a:t>
             </a:r>
           </a:p>
@@ -6524,6 +7019,7 @@
               </a:defRPr>
             </a:pPr>
             <a:r>
+              <a:rPr lang="en-US" noProof="0" dirty="0"/>
               <a:t>Training uses normal videos.</a:t>
             </a:r>
           </a:p>
@@ -6540,6 +7036,7 @@
               </a:defRPr>
             </a:pPr>
             <a:r>
+              <a:rPr lang="en-US" noProof="0" dirty="0"/>
               <a:t>Anomalies are detected through reconstruction or prediction errors.</a:t>
             </a:r>
           </a:p>
@@ -6556,7 +7053,16 @@
               </a:defRPr>
             </a:pPr>
             <a:r>
-              <a:t>Typical datasets: Ped2, Avenue, ShanghaiTech.</a:t>
+              <a:rPr lang="en-US" noProof="0" dirty="0"/>
+              <a:t>Typical datasets: Ped2, Avenue, </a:t>
+            </a:r>
+            <a:r>
+              <a:rPr lang="en-US" noProof="0" dirty="0" err="1"/>
+              <a:t>ShanghaiTech</a:t>
+            </a:r>
+            <a:r>
+              <a:rPr lang="en-US" noProof="0" dirty="0"/>
+              <a:t>.</a:t>
             </a:r>
           </a:p>
         </p:txBody>
@@ -6592,6 +7098,7 @@
               </a:defRPr>
             </a:pPr>
             <a:r>
+              <a:rPr lang="en-US" noProof="0" dirty="0"/>
               <a:t>Weakly Supervised VAD</a:t>
             </a:r>
           </a:p>
@@ -6631,6 +7138,7 @@
               </a:defRPr>
             </a:pPr>
             <a:r>
+              <a:rPr lang="en-US" noProof="0" dirty="0"/>
               <a:t>Training uses video-level labels.</a:t>
             </a:r>
           </a:p>
@@ -6647,6 +7155,7 @@
               </a:defRPr>
             </a:pPr>
             <a:r>
+              <a:rPr lang="en-US" noProof="0" dirty="0"/>
               <a:t>The model learns to localize anomalous segments.</a:t>
             </a:r>
           </a:p>
@@ -6663,6 +7172,7 @@
               </a:defRPr>
             </a:pPr>
             <a:r>
+              <a:rPr lang="en-US" noProof="0" dirty="0"/>
               <a:t>Typical datasets: UCF-Crime, XD-Violence.</a:t>
             </a:r>
           </a:p>
@@ -6679,9 +7189,23 @@
 <file path=ppt/slides/slide5.xml><?xml version="1.0" encoding="utf-8"?>
 <p:sld xmlns:a="http://schemas.openxmlformats.org/drawingml/2006/main" xmlns:r="http://schemas.openxmlformats.org/officeDocument/2006/relationships" xmlns:p="http://schemas.openxmlformats.org/presentationml/2006/main">
   <p:cSld>
+    <p:bg>
+      <p:bgPr>
+        <a:solidFill>
+          <a:srgbClr val="F8FAFC"/>
+        </a:solidFill>
+        <a:effectLst/>
+      </p:bgPr>
+    </p:bg>
     <p:spTree>
       <p:nvGrpSpPr>
-        <p:cNvPr id="1" name=""/>
+        <p:cNvPr id="1" name="">
+          <a:extLst>
+            <a:ext uri="{FF2B5EF4-FFF2-40B4-BE49-F238E27FC236}">
+              <a16:creationId xmlns:a16="http://schemas.microsoft.com/office/drawing/2014/main" id="{B62FEEA8-A432-33BA-697D-136D40CF23EF}"/>
+            </a:ext>
+          </a:extLst>
+        </p:cNvPr>
         <p:cNvGrpSpPr/>
         <p:nvPr/>
       </p:nvGrpSpPr>
@@ -6695,10 +7219,10 @@
       </p:grpSpPr>
       <p:sp>
         <p:nvSpPr>
-          <p:cNvPr id="3" name="TextBox 1">
+          <p:cNvPr id="9" name="TextBox 1">
             <a:extLst>
               <a:ext uri="{FF2B5EF4-FFF2-40B4-BE49-F238E27FC236}">
-                <a16:creationId xmlns:a16="http://schemas.microsoft.com/office/drawing/2014/main" id="{69EB57F6-56C9-01E4-D971-D90CB1503036}"/>
+                <a16:creationId xmlns:a16="http://schemas.microsoft.com/office/drawing/2014/main" id="{94AD2C92-91B5-BEB7-D46C-7EF842908ABA}"/>
               </a:ext>
             </a:extLst>
           </p:cNvPr>
@@ -6730,7 +7254,7 @@
               </a:defRPr>
             </a:pPr>
             <a:r>
-              <a:rPr lang="en-US" dirty="0"/>
+              <a:rPr lang="en-US" noProof="0" dirty="0"/>
               <a:t>Papers to review</a:t>
             </a:r>
           </a:p>
@@ -6738,10 +7262,10 @@
       </p:sp>
       <p:graphicFrame>
         <p:nvGraphicFramePr>
-          <p:cNvPr id="5" name="Tabla 4">
+          <p:cNvPr id="10" name="Tabla 9">
             <a:extLst>
               <a:ext uri="{FF2B5EF4-FFF2-40B4-BE49-F238E27FC236}">
-                <a16:creationId xmlns:a16="http://schemas.microsoft.com/office/drawing/2014/main" id="{7AE13753-EFE1-EA95-830D-24CC42180CDC}"/>
+                <a16:creationId xmlns:a16="http://schemas.microsoft.com/office/drawing/2014/main" id="{E91377F1-1D28-61FD-526F-35CBCEDAB28C}"/>
               </a:ext>
             </a:extLst>
           </p:cNvPr>
@@ -6751,7 +7275,7 @@
           <p:nvPr>
             <p:extLst>
               <p:ext uri="{D42A27DB-BD31-4B8C-83A1-F6EECF244321}">
-                <p14:modId xmlns:p14="http://schemas.microsoft.com/office/powerpoint/2010/main" val="812213453"/>
+                <p14:modId xmlns:p14="http://schemas.microsoft.com/office/powerpoint/2010/main" val="149922507"/>
               </p:ext>
             </p:extLst>
           </p:nvPr>
@@ -6794,14 +7318,11 @@
                     <a:lstStyle/>
                     <a:p>
                       <a:r>
-                        <a:rPr lang="es-MX" sz="2000" b="1" dirty="0" err="1">
+                        <a:rPr lang="en-US" sz="2000" b="1" noProof="0" dirty="0">
                           <a:effectLst/>
                         </a:rPr>
                         <a:t>Paper</a:t>
                       </a:r>
-                      <a:endParaRPr lang="es-MX" sz="2000" b="1" dirty="0">
-                        <a:effectLst/>
-                      </a:endParaRPr>
                     </a:p>
                   </a:txBody>
                   <a:tcPr marL="69253" marR="69253" marT="31963" marB="31963" anchor="ctr">
@@ -6853,7 +7374,7 @@
                     <a:p>
                       <a:pPr algn="r"/>
                       <a:r>
-                        <a:rPr lang="es-MX" sz="2000" b="1">
+                        <a:rPr lang="en-US" sz="2000" b="1" noProof="0" dirty="0">
                           <a:effectLst/>
                         </a:rPr>
                         <a:t>Year</a:t>
@@ -6909,20 +7430,11 @@
                     <a:p>
                       <a:pPr algn="r"/>
                       <a:r>
-                        <a:rPr lang="es-MX" sz="2000" b="1" dirty="0">
+                        <a:rPr lang="en-US" sz="2000" b="1" noProof="0" dirty="0">
                           <a:effectLst/>
                         </a:rPr>
-                        <a:t>VAD </a:t>
+                        <a:t>VAD Type</a:t>
                       </a:r>
-                      <a:r>
-                        <a:rPr lang="es-MX" sz="2000" b="1" dirty="0" err="1">
-                          <a:effectLst/>
-                        </a:rPr>
-                        <a:t>Type</a:t>
-                      </a:r>
-                      <a:endParaRPr lang="es-MX" sz="2000" b="1" dirty="0">
-                        <a:effectLst/>
-                      </a:endParaRPr>
                     </a:p>
                   </a:txBody>
                   <a:tcPr marL="69253" marR="69253" marT="31963" marB="31963" anchor="ctr">
@@ -6980,13 +7492,13 @@
                     <a:lstStyle/>
                     <a:p>
                       <a:r>
-                        <a:rPr lang="en-US" sz="2000" b="1" dirty="0" err="1">
+                        <a:rPr lang="en-US" sz="2000" b="1" noProof="0" dirty="0">
                           <a:effectLst/>
                         </a:rPr>
                         <a:t>VADMamba</a:t>
                       </a:r>
                       <a:r>
-                        <a:rPr lang="en-US" sz="2000" dirty="0">
+                        <a:rPr lang="en-US" sz="2000" noProof="0" dirty="0">
                           <a:effectLst/>
                         </a:rPr>
                         <a:t>: Exploring State Space Models for Fast Video Anomaly Detection</a:t>
@@ -7042,7 +7554,7 @@
                     <a:p>
                       <a:pPr algn="r"/>
                       <a:r>
-                        <a:rPr lang="es-MX" sz="2000" dirty="0">
+                        <a:rPr lang="en-US" sz="2000" noProof="0" dirty="0">
                           <a:effectLst/>
                         </a:rPr>
                         <a:t>2025</a:t>
@@ -7098,14 +7610,11 @@
                     <a:p>
                       <a:pPr algn="r"/>
                       <a:r>
-                        <a:rPr lang="es-MX" sz="2000" b="0" dirty="0" err="1">
+                        <a:rPr lang="en-US" sz="2000" b="0" noProof="0" dirty="0">
                           <a:effectLst/>
                         </a:rPr>
                         <a:t>Unsupervised</a:t>
                       </a:r>
-                      <a:endParaRPr lang="es-MX" sz="2000" b="0" dirty="0">
-                        <a:effectLst/>
-                      </a:endParaRPr>
                     </a:p>
                   </a:txBody>
                   <a:tcPr marL="69253" marR="69253" marT="31963" marB="31963" anchor="ctr">
@@ -7163,13 +7672,13 @@
                     <a:lstStyle/>
                     <a:p>
                       <a:r>
-                        <a:rPr lang="en-US" sz="2000" b="1" dirty="0" err="1">
+                        <a:rPr lang="en-US" sz="2000" b="1" noProof="0" dirty="0">
                           <a:effectLst/>
                         </a:rPr>
                         <a:t>STNMamba</a:t>
                       </a:r>
                       <a:r>
-                        <a:rPr lang="en-US" sz="2000" dirty="0">
+                        <a:rPr lang="en-US" sz="2000" noProof="0" dirty="0">
                           <a:effectLst/>
                         </a:rPr>
                         <a:t>: Mamba-based Spatial-Temporal Normality Learning for Video Anomaly Detection</a:t>
@@ -7225,7 +7734,7 @@
                     <a:p>
                       <a:pPr algn="r"/>
                       <a:r>
-                        <a:rPr lang="es-MX" sz="2000">
+                        <a:rPr lang="en-US" sz="2000" noProof="0" dirty="0">
                           <a:effectLst/>
                         </a:rPr>
                         <a:t>2024/2025</a:t>
@@ -7281,14 +7790,11 @@
                     <a:p>
                       <a:pPr algn="r"/>
                       <a:r>
-                        <a:rPr lang="es-MX" sz="2000" b="0" dirty="0" err="1">
+                        <a:rPr lang="en-US" sz="2000" b="0" noProof="0" dirty="0">
                           <a:effectLst/>
                         </a:rPr>
                         <a:t>Unsupervised</a:t>
                       </a:r>
-                      <a:endParaRPr lang="es-MX" sz="2000" b="0" dirty="0">
-                        <a:effectLst/>
-                      </a:endParaRPr>
                     </a:p>
                   </a:txBody>
                   <a:tcPr marL="69253" marR="69253" marT="31963" marB="31963" anchor="ctr">
@@ -7346,13 +7852,13 @@
                     <a:lstStyle/>
                     <a:p>
                       <a:r>
-                        <a:rPr lang="en-US" sz="2000" b="1" dirty="0">
+                        <a:rPr lang="en-US" sz="2000" b="1" noProof="0" dirty="0">
                           <a:effectLst/>
                         </a:rPr>
                         <a:t>M²S²L</a:t>
                       </a:r>
                       <a:r>
-                        <a:rPr lang="en-US" sz="2000" dirty="0">
+                        <a:rPr lang="en-US" sz="2000" noProof="0" dirty="0">
                           <a:effectLst/>
                         </a:rPr>
                         <a:t>: Mamba-based Multi-Scale Spatial-temporal Learning for Video Anomaly Detection</a:t>
@@ -7408,7 +7914,7 @@
                     <a:p>
                       <a:pPr algn="r"/>
                       <a:r>
-                        <a:rPr lang="es-MX" sz="2000">
+                        <a:rPr lang="en-US" sz="2000" noProof="0" dirty="0">
                           <a:effectLst/>
                         </a:rPr>
                         <a:t>2025</a:t>
@@ -7464,14 +7970,11 @@
                     <a:p>
                       <a:pPr algn="r"/>
                       <a:r>
-                        <a:rPr lang="es-MX" sz="2000" b="0" dirty="0" err="1">
+                        <a:rPr lang="en-US" sz="2000" b="0" noProof="0" dirty="0">
                           <a:effectLst/>
                         </a:rPr>
                         <a:t>Unsupervised</a:t>
                       </a:r>
-                      <a:endParaRPr lang="es-MX" sz="2000" b="0" dirty="0">
-                        <a:effectLst/>
-                      </a:endParaRPr>
                     </a:p>
                   </a:txBody>
                   <a:tcPr marL="69253" marR="69253" marT="31963" marB="31963" anchor="ctr">
@@ -7529,16 +8032,10 @@
                     <a:lstStyle/>
                     <a:p>
                       <a:r>
-                        <a:rPr lang="es-MX" sz="2000" b="1" dirty="0" err="1">
+                        <a:rPr lang="en-US" sz="2000" b="1" noProof="0" dirty="0">
                           <a:effectLst/>
                         </a:rPr>
-                        <a:t>VADMamba</a:t>
-                      </a:r>
-                      <a:r>
-                        <a:rPr lang="es-MX" sz="2000" b="1" dirty="0">
-                          <a:effectLst/>
-                        </a:rPr>
-                        <a:t>++</a:t>
+                        <a:t>VADMamba++</a:t>
                       </a:r>
                     </a:p>
                   </a:txBody>
@@ -7591,7 +8088,7 @@
                     <a:p>
                       <a:pPr algn="r"/>
                       <a:r>
-                        <a:rPr lang="es-MX" sz="2000">
+                        <a:rPr lang="en-US" sz="2000" noProof="0" dirty="0">
                           <a:effectLst/>
                         </a:rPr>
                         <a:t>2026</a:t>
@@ -7647,14 +8144,11 @@
                     <a:p>
                       <a:pPr algn="r"/>
                       <a:r>
-                        <a:rPr lang="es-MX" sz="2000" b="0" dirty="0" err="1">
+                        <a:rPr lang="en-US" sz="2000" b="0" noProof="0" dirty="0">
                           <a:effectLst/>
                         </a:rPr>
                         <a:t>Unsupervised</a:t>
                       </a:r>
-                      <a:endParaRPr lang="es-MX" sz="2000" b="0" dirty="0">
-                        <a:effectLst/>
-                      </a:endParaRPr>
                     </a:p>
                   </a:txBody>
                   <a:tcPr marL="69253" marR="69253" marT="31963" marB="31963" anchor="ctr">
@@ -7712,13 +8206,13 @@
                     <a:lstStyle/>
                     <a:p>
                       <a:r>
-                        <a:rPr lang="en-US" sz="2000" b="1" dirty="0">
+                        <a:rPr lang="en-US" sz="2000" b="1" noProof="0" dirty="0">
                           <a:effectLst/>
                         </a:rPr>
                         <a:t>Multilingual-Prompt-Guided</a:t>
                       </a:r>
                       <a:r>
-                        <a:rPr lang="en-US" sz="2000" dirty="0">
+                        <a:rPr lang="en-US" sz="2000" noProof="0" dirty="0">
                           <a:effectLst/>
                         </a:rPr>
                         <a:t> Directional Feature Learning for Weakly Supervised Video Anomaly Detection</a:t>
@@ -7774,7 +8268,7 @@
                     <a:p>
                       <a:pPr algn="r"/>
                       <a:r>
-                        <a:rPr lang="es-MX" sz="2000" b="0" dirty="0">
+                        <a:rPr lang="en-US" sz="2000" b="0" noProof="0" dirty="0">
                           <a:effectLst/>
                         </a:rPr>
                         <a:t>2025</a:t>
@@ -7830,26 +8324,11 @@
                     <a:p>
                       <a:pPr algn="r"/>
                       <a:r>
-                        <a:rPr lang="es-MX" sz="2000" dirty="0" err="1">
+                        <a:rPr lang="en-US" sz="2000" noProof="0" dirty="0">
                           <a:effectLst/>
                         </a:rPr>
-                        <a:t>Weakly</a:t>
+                        <a:t>Weakly Supervised</a:t>
                       </a:r>
-                      <a:r>
-                        <a:rPr lang="es-MX" sz="2000" dirty="0">
-                          <a:effectLst/>
-                        </a:rPr>
-                        <a:t> </a:t>
-                      </a:r>
-                      <a:r>
-                        <a:rPr lang="es-MX" sz="2000" dirty="0" err="1">
-                          <a:effectLst/>
-                        </a:rPr>
-                        <a:t>Supervised</a:t>
-                      </a:r>
-                      <a:endParaRPr lang="es-MX" sz="2000" dirty="0">
-                        <a:effectLst/>
-                      </a:endParaRPr>
                     </a:p>
                   </a:txBody>
                   <a:tcPr marL="69253" marR="69253" marT="31963" marB="31963" anchor="ctr">
@@ -7907,7 +8386,7 @@
     </p:spTree>
     <p:extLst>
       <p:ext uri="{BB962C8B-B14F-4D97-AF65-F5344CB8AC3E}">
-        <p14:creationId xmlns:p14="http://schemas.microsoft.com/office/powerpoint/2010/main" val="4239778701"/>
+        <p14:creationId xmlns:p14="http://schemas.microsoft.com/office/powerpoint/2010/main" val="817068475"/>
       </p:ext>
     </p:extLst>
   </p:cSld>
@@ -7973,10 +8452,9 @@
               </a:defRPr>
             </a:pPr>
             <a:r>
-              <a:rPr dirty="0" err="1"/>
+              <a:rPr lang="en-US" noProof="0" dirty="0"/>
               <a:t>VADMamba</a:t>
             </a:r>
-            <a:endParaRPr dirty="0"/>
           </a:p>
         </p:txBody>
       </p:sp>
@@ -7989,7 +8467,7 @@
         <p:spPr>
           <a:xfrm>
             <a:off x="685800" y="1143000"/>
-            <a:ext cx="5074920" cy="4297680"/>
+            <a:ext cx="5074920" cy="2144177"/>
           </a:xfrm>
           <a:prstGeom prst="rect">
             <a:avLst/>
@@ -8002,7 +8480,7 @@
           </a:bodyPr>
           <a:lstStyle/>
           <a:p>
-            <a:pPr>
+            <a:pPr algn="just">
               <a:spcAft>
                 <a:spcPts val="800"/>
               </a:spcAft>
@@ -8014,16 +8492,12 @@
               </a:defRPr>
             </a:pPr>
             <a:r>
-              <a:rPr dirty="0" err="1"/>
-              <a:t>VADMamba</a:t>
-            </a:r>
-            <a:r>
-              <a:rPr dirty="0"/>
-              <a:t> applies Mamba to reconstruction- and prediction-based VAD.</a:t>
-            </a:r>
-          </a:p>
-          <a:p>
-            <a:pPr>
+              <a:rPr lang="en-US" noProof="0" dirty="0"/>
+              <a:t>It is trained only on normal videos, not weak video-level anomaly labels.</a:t>
+            </a:r>
+          </a:p>
+          <a:p>
+            <a:pPr algn="just">
               <a:spcAft>
                 <a:spcPts val="800"/>
               </a:spcAft>
@@ -8035,12 +8509,17 @@
               </a:defRPr>
             </a:pPr>
             <a:r>
-              <a:rPr dirty="0"/>
-              <a:t>It is trained only on normal videos, not weak video-level anomaly labels.</a:t>
-            </a:r>
-          </a:p>
-          <a:p>
-            <a:pPr>
+              <a:rPr lang="en-US" dirty="0"/>
+              <a:t>Detects anomalies through </a:t>
+            </a:r>
+            <a:r>
+              <a:rPr lang="en-US" altLang="ja-JP" dirty="0"/>
+              <a:t>prediction and reconstruction.</a:t>
+            </a:r>
+            <a:endParaRPr lang="en-US" noProof="0" dirty="0"/>
+          </a:p>
+          <a:p>
+            <a:pPr algn="just">
               <a:spcAft>
                 <a:spcPts val="800"/>
               </a:spcAft>
@@ -8052,12 +8531,200 @@
               </a:defRPr>
             </a:pPr>
             <a:r>
-              <a:rPr dirty="0"/>
-              <a:t>The model uses frame prediction and optical-flow reconstruction as proxy tasks.</a:t>
-            </a:r>
-          </a:p>
-          <a:p>
-            <a:pPr>
+              <a:rPr lang="en-US" noProof="0" dirty="0"/>
+              <a:t>The model uses </a:t>
+            </a:r>
+            <a:r>
+              <a:rPr lang="en-US" b="1" noProof="0" dirty="0"/>
+              <a:t>frame prediction</a:t>
+            </a:r>
+            <a:r>
+              <a:rPr lang="en-US" noProof="0" dirty="0"/>
+              <a:t> and </a:t>
+            </a:r>
+            <a:r>
+              <a:rPr lang="en-US" b="1" noProof="0" dirty="0"/>
+              <a:t>optical-flow reconstruction </a:t>
+            </a:r>
+            <a:r>
+              <a:rPr lang="en-US" noProof="0" dirty="0"/>
+              <a:t>as proxy tasks.</a:t>
+            </a:r>
+          </a:p>
+        </p:txBody>
+      </p:sp>
+      <p:grpSp>
+        <p:nvGrpSpPr>
+          <p:cNvPr id="8" name="Grupo 7">
+            <a:extLst>
+              <a:ext uri="{FF2B5EF4-FFF2-40B4-BE49-F238E27FC236}">
+                <a16:creationId xmlns:a16="http://schemas.microsoft.com/office/drawing/2014/main" id="{37081258-1EDA-5FD2-0437-C7F02597A650}"/>
+              </a:ext>
+            </a:extLst>
+          </p:cNvPr>
+          <p:cNvGrpSpPr/>
+          <p:nvPr/>
+        </p:nvGrpSpPr>
+        <p:grpSpPr>
+          <a:xfrm>
+            <a:off x="6172200" y="1143000"/>
+            <a:ext cx="4754880" cy="2144177"/>
+            <a:chOff x="6172200" y="1325880"/>
+            <a:chExt cx="4754880" cy="3259149"/>
+          </a:xfrm>
+        </p:grpSpPr>
+        <p:sp>
+          <p:nvSpPr>
+            <p:cNvPr id="4" name="Rounded Rectangle 3"/>
+            <p:cNvSpPr/>
+            <p:nvPr/>
+          </p:nvSpPr>
+          <p:spPr>
+            <a:xfrm>
+              <a:off x="6172200" y="1325880"/>
+              <a:ext cx="4754880" cy="3259149"/>
+            </a:xfrm>
+            <a:prstGeom prst="roundRect">
+              <a:avLst>
+                <a:gd name="adj" fmla="val 8000"/>
+              </a:avLst>
+            </a:prstGeom>
+            <a:solidFill>
+              <a:srgbClr val="FEF3C7"/>
+            </a:solidFill>
+            <a:ln>
+              <a:solidFill>
+                <a:srgbClr val="FEF3C7"/>
+              </a:solidFill>
+            </a:ln>
+          </p:spPr>
+          <p:style>
+            <a:lnRef idx="1">
+              <a:schemeClr val="accent1"/>
+            </a:lnRef>
+            <a:fillRef idx="3">
+              <a:schemeClr val="accent1"/>
+            </a:fillRef>
+            <a:effectRef idx="2">
+              <a:schemeClr val="accent1"/>
+            </a:effectRef>
+            <a:fontRef idx="minor">
+              <a:schemeClr val="lt1"/>
+            </a:fontRef>
+          </p:style>
+          <p:txBody>
+            <a:bodyPr rtlCol="0" anchor="ctr"/>
+            <a:lstStyle/>
+            <a:p>
+              <a:pPr algn="ctr"/>
+              <a:endParaRPr lang="en-US" noProof="0" dirty="0"/>
+            </a:p>
+          </p:txBody>
+        </p:sp>
+        <p:sp>
+          <p:nvSpPr>
+            <p:cNvPr id="5" name="TextBox 4"/>
+            <p:cNvSpPr txBox="1"/>
+            <p:nvPr/>
+          </p:nvSpPr>
+          <p:spPr>
+            <a:xfrm>
+              <a:off x="6492240" y="1455211"/>
+              <a:ext cx="4114800" cy="411481"/>
+            </a:xfrm>
+            <a:prstGeom prst="rect">
+              <a:avLst/>
+            </a:prstGeom>
+            <a:noFill/>
+          </p:spPr>
+          <p:txBody>
+            <a:bodyPr wrap="square">
+              <a:spAutoFit/>
+            </a:bodyPr>
+            <a:lstStyle/>
+            <a:p>
+              <a:pPr>
+                <a:defRPr sz="2600" b="1">
+                  <a:solidFill>
+                    <a:srgbClr val="B45309"/>
+                  </a:solidFill>
+                  <a:latin typeface="Aptos Display"/>
+                </a:defRPr>
+              </a:pPr>
+              <a:r>
+                <a:rPr lang="en-US" noProof="0" dirty="0"/>
+                <a:t>Contribution</a:t>
+              </a:r>
+            </a:p>
+          </p:txBody>
+        </p:sp>
+        <p:sp>
+          <p:nvSpPr>
+            <p:cNvPr id="6" name="TextBox 5"/>
+            <p:cNvSpPr txBox="1"/>
+            <p:nvPr/>
+          </p:nvSpPr>
+          <p:spPr>
+            <a:xfrm>
+              <a:off x="6492240" y="2219920"/>
+              <a:ext cx="4069080" cy="1446551"/>
+            </a:xfrm>
+            <a:prstGeom prst="rect">
+              <a:avLst/>
+            </a:prstGeom>
+            <a:noFill/>
+          </p:spPr>
+          <p:txBody>
+            <a:bodyPr wrap="square">
+              <a:spAutoFit/>
+            </a:bodyPr>
+            <a:lstStyle/>
+            <a:p>
+              <a:pPr algn="just">
+                <a:defRPr sz="2200" b="0">
+                  <a:solidFill>
+                    <a:srgbClr val="4B5563"/>
+                  </a:solidFill>
+                  <a:latin typeface="Aptos"/>
+                </a:defRPr>
+              </a:pPr>
+              <a:r>
+                <a:rPr lang="en-US" noProof="0" dirty="0"/>
+                <a:t>It shows that Mamba can replace CNN or Transformer temporal modules in efficient unsupervised VAD.</a:t>
+              </a:r>
+            </a:p>
+          </p:txBody>
+        </p:sp>
+      </p:grpSp>
+      <p:sp>
+        <p:nvSpPr>
+          <p:cNvPr id="7" name="TextBox 2">
+            <a:extLst>
+              <a:ext uri="{FF2B5EF4-FFF2-40B4-BE49-F238E27FC236}">
+                <a16:creationId xmlns:a16="http://schemas.microsoft.com/office/drawing/2014/main" id="{8A84D128-FCD4-610A-FADE-D348ACDFFE62}"/>
+              </a:ext>
+            </a:extLst>
+          </p:cNvPr>
+          <p:cNvSpPr txBox="1"/>
+          <p:nvPr/>
+        </p:nvSpPr>
+        <p:spPr>
+          <a:xfrm>
+            <a:off x="655320" y="4414748"/>
+            <a:ext cx="10881360" cy="1426031"/>
+          </a:xfrm>
+          <a:prstGeom prst="rect">
+            <a:avLst/>
+          </a:prstGeom>
+          <a:noFill/>
+        </p:spPr>
+        <p:txBody>
+          <a:bodyPr wrap="square">
+            <a:spAutoFit/>
+          </a:bodyPr>
+          <a:lstStyle/>
+          <a:p>
+            <a:pPr algn="just">
               <a:spcAft>
                 <a:spcPts val="800"/>
               </a:spcAft>
@@ -8069,120 +8736,16 @@
               </a:defRPr>
             </a:pPr>
             <a:r>
-              <a:rPr dirty="0"/>
-              <a:t>At inference time, larger reconstruction or prediction errors become anomaly evidence.</a:t>
-            </a:r>
-          </a:p>
-        </p:txBody>
-      </p:sp>
-      <p:sp>
-        <p:nvSpPr>
-          <p:cNvPr id="4" name="Rounded Rectangle 3"/>
-          <p:cNvSpPr/>
-          <p:nvPr/>
-        </p:nvSpPr>
-        <p:spPr>
-          <a:xfrm>
-            <a:off x="6172200" y="1325880"/>
-            <a:ext cx="4754880" cy="3474720"/>
-          </a:xfrm>
-          <a:prstGeom prst="roundRect">
-            <a:avLst>
-              <a:gd name="adj" fmla="val 8000"/>
-            </a:avLst>
-          </a:prstGeom>
-          <a:solidFill>
-            <a:srgbClr val="FEF3C7"/>
-          </a:solidFill>
-          <a:ln>
-            <a:solidFill>
-              <a:srgbClr val="FEF3C7"/>
-            </a:solidFill>
-          </a:ln>
-        </p:spPr>
-        <p:style>
-          <a:lnRef idx="1">
-            <a:schemeClr val="accent1"/>
-          </a:lnRef>
-          <a:fillRef idx="3">
-            <a:schemeClr val="accent1"/>
-          </a:fillRef>
-          <a:effectRef idx="2">
-            <a:schemeClr val="accent1"/>
-          </a:effectRef>
-          <a:fontRef idx="minor">
-            <a:schemeClr val="lt1"/>
-          </a:fontRef>
-        </p:style>
-        <p:txBody>
-          <a:bodyPr rtlCol="0" anchor="ctr"/>
-          <a:lstStyle/>
-          <a:p>
-            <a:pPr algn="ctr"/>
-            <a:endParaRPr/>
-          </a:p>
-        </p:txBody>
-      </p:sp>
-      <p:sp>
-        <p:nvSpPr>
-          <p:cNvPr id="5" name="TextBox 4"/>
-          <p:cNvSpPr txBox="1"/>
-          <p:nvPr/>
-        </p:nvSpPr>
-        <p:spPr>
-          <a:xfrm>
-            <a:off x="6492240" y="1691640"/>
-            <a:ext cx="4114800" cy="411480"/>
-          </a:xfrm>
-          <a:prstGeom prst="rect">
-            <a:avLst/>
-          </a:prstGeom>
-          <a:noFill/>
-        </p:spPr>
-        <p:txBody>
-          <a:bodyPr wrap="square">
-            <a:spAutoFit/>
-          </a:bodyPr>
-          <a:lstStyle/>
-          <a:p>
-            <a:pPr>
-              <a:defRPr sz="2600" b="1">
-                <a:solidFill>
-                  <a:srgbClr val="B45309"/>
-                </a:solidFill>
-                <a:latin typeface="Aptos Display"/>
-              </a:defRPr>
-            </a:pPr>
-            <a:r>
-              <a:t>Contribution</a:t>
-            </a:r>
-          </a:p>
-        </p:txBody>
-      </p:sp>
-      <p:sp>
-        <p:nvSpPr>
-          <p:cNvPr id="6" name="TextBox 5"/>
-          <p:cNvSpPr txBox="1"/>
-          <p:nvPr/>
-        </p:nvSpPr>
-        <p:spPr>
-          <a:xfrm>
-            <a:off x="6492240" y="2423160"/>
-            <a:ext cx="4069080" cy="1325880"/>
-          </a:xfrm>
-          <a:prstGeom prst="rect">
-            <a:avLst/>
-          </a:prstGeom>
-          <a:noFill/>
-        </p:spPr>
-        <p:txBody>
-          <a:bodyPr wrap="square">
-            <a:spAutoFit/>
-          </a:bodyPr>
-          <a:lstStyle/>
-          <a:p>
-            <a:pPr>
-              <a:defRPr sz="2200" b="0">
+              <a:rPr lang="en-US" b="1" dirty="0"/>
+              <a:t>Prediction: </a:t>
+            </a:r>
+          </a:p>
+          <a:p>
+            <a:pPr algn="just">
+              <a:spcAft>
+                <a:spcPts val="800"/>
+              </a:spcAft>
+              <a:defRPr sz="2000">
                 <a:solidFill>
                   <a:srgbClr val="4B5563"/>
                 </a:solidFill>
@@ -8190,7 +8753,28 @@
               </a:defRPr>
             </a:pPr>
             <a:r>
-              <a:t>It shows that Mamba can replace CNN or Transformer temporal modules in efficient unsupervised VAD.</a:t>
+              <a:rPr lang="en-US" b="1" dirty="0"/>
+              <a:t>Reconstruction:</a:t>
+            </a:r>
+            <a:r>
+              <a:rPr lang="en-US" dirty="0"/>
+              <a:t> </a:t>
+            </a:r>
+            <a:r>
+              <a:rPr lang="en-US" altLang="ja-JP" dirty="0"/>
+              <a:t>Consists of reconstructing the input frame (or its representation). T</a:t>
+            </a:r>
+            <a:r>
+              <a:rPr lang="en-US" altLang="ja-JP" sz="2000" dirty="0"/>
+              <a:t>he model may reconstruct the anomalous frame less accurately; therefore, </a:t>
+            </a:r>
+            <a:r>
+              <a:rPr lang="en-US" altLang="ja-JP" sz="2000" b="1" dirty="0"/>
+              <a:t>a high reconstruction error indicates a higher likelihood that the frame contains anomalous content.</a:t>
+            </a:r>
+            <a:r>
+              <a:rPr lang="en-US" b="1" dirty="0"/>
+              <a:t> </a:t>
             </a:r>
           </a:p>
         </p:txBody>
@@ -8259,6 +8843,7 @@
               </a:defRPr>
             </a:pPr>
             <a:r>
+              <a:rPr lang="en-US" noProof="0" dirty="0"/>
               <a:t>VADMamba: What It Does Not Solve</a:t>
             </a:r>
           </a:p>
@@ -8298,6 +8883,7 @@
               </a:defRPr>
             </a:pPr>
             <a:r>
+              <a:rPr lang="en-US" noProof="0" dirty="0"/>
               <a:t>It does not compete directly with Sultani, RTFM, VADCLIP, or other WSVAD methods.</a:t>
             </a:r>
           </a:p>
@@ -8314,6 +8900,7 @@
               </a:defRPr>
             </a:pPr>
             <a:r>
+              <a:rPr lang="en-US" noProof="0" dirty="0"/>
               <a:t>It does not use CLIP-style semantic guidance.</a:t>
             </a:r>
           </a:p>
@@ -8330,6 +8917,7 @@
               </a:defRPr>
             </a:pPr>
             <a:r>
+              <a:rPr lang="en-US" noProof="0" dirty="0"/>
               <a:t>It does not learn from video-level abnormal labels.</a:t>
             </a:r>
           </a:p>
@@ -8346,6 +8934,7 @@
               </a:defRPr>
             </a:pPr>
             <a:r>
+              <a:rPr lang="en-US" noProof="0" dirty="0"/>
               <a:t>For WSVAD research, its value is mainly as evidence that Mamba is a useful temporal backbone.</a:t>
             </a:r>
           </a:p>
@@ -8415,6 +9004,7 @@
               </a:defRPr>
             </a:pPr>
             <a:r>
+              <a:rPr lang="en-US" noProof="0" dirty="0"/>
               <a:t>STNMamba</a:t>
             </a:r>
           </a:p>
@@ -8454,6 +9044,7 @@
               </a:defRPr>
             </a:pPr>
             <a:r>
+              <a:rPr lang="en-US" noProof="0" dirty="0"/>
               <a:t>STNMamba argues that vanilla Mamba is not enough for spatial-temporal normality learning.</a:t>
             </a:r>
           </a:p>
@@ -8470,6 +9061,7 @@
               </a:defRPr>
             </a:pPr>
             <a:r>
+              <a:rPr lang="en-US" noProof="0" dirty="0"/>
               <a:t>It introduces a multi-scale spatial encoder for anomalies of different sizes.</a:t>
             </a:r>
           </a:p>
@@ -8486,6 +9078,7 @@
               </a:defRPr>
             </a:pPr>
             <a:r>
+              <a:rPr lang="en-US" noProof="0" dirty="0"/>
               <a:t>It uses RGB frame differences instead of optical flow for lower-cost motion cues.</a:t>
             </a:r>
           </a:p>
@@ -8502,6 +9095,7 @@
               </a:defRPr>
             </a:pPr>
             <a:r>
+              <a:rPr lang="en-US" noProof="0" dirty="0"/>
               <a:t>It performs multi-level spatial-temporal fusion and stores normal prototypes in memory banks.</a:t>
             </a:r>
           </a:p>
@@ -8551,7 +9145,7 @@
           <a:lstStyle/>
           <a:p>
             <a:pPr algn="ctr"/>
-            <a:endParaRPr/>
+            <a:endParaRPr lang="en-US" noProof="0" dirty="0"/>
           </a:p>
         </p:txBody>
       </p:sp>
@@ -8599,7 +9193,7 @@
           <a:lstStyle/>
           <a:p>
             <a:pPr algn="ctr"/>
-            <a:endParaRPr/>
+            <a:endParaRPr lang="en-US" noProof="0" dirty="0"/>
           </a:p>
         </p:txBody>
       </p:sp>
@@ -8647,7 +9241,7 @@
           <a:lstStyle/>
           <a:p>
             <a:pPr algn="ctr"/>
-            <a:endParaRPr/>
+            <a:endParaRPr lang="en-US" noProof="0" dirty="0"/>
           </a:p>
         </p:txBody>
       </p:sp>
@@ -8695,7 +9289,7 @@
           <a:lstStyle/>
           <a:p>
             <a:pPr algn="ctr"/>
-            <a:endParaRPr/>
+            <a:endParaRPr lang="en-US" noProof="0" dirty="0"/>
           </a:p>
         </p:txBody>
       </p:sp>
@@ -8730,6 +9324,7 @@
               </a:defRPr>
             </a:pPr>
             <a:r>
+              <a:rPr lang="en-US" noProof="0" dirty="0"/>
               <a:t>MS-VSSB</a:t>
             </a:r>
           </a:p>
@@ -8766,6 +9361,7 @@
               </a:defRPr>
             </a:pPr>
             <a:r>
+              <a:rPr lang="en-US" noProof="0" dirty="0"/>
               <a:t>CA-VSSB</a:t>
             </a:r>
           </a:p>
@@ -8802,6 +9398,7 @@
               </a:defRPr>
             </a:pPr>
             <a:r>
+              <a:rPr lang="en-US" noProof="0" dirty="0"/>
               <a:t>STIM + STFB</a:t>
             </a:r>
           </a:p>
@@ -8838,6 +9435,7 @@
               </a:defRPr>
             </a:pPr>
             <a:r>
+              <a:rPr lang="en-US" noProof="0" dirty="0"/>
               <a:t>Memory Banks</a:t>
             </a:r>
           </a:p>
@@ -8907,6 +9505,7 @@
               </a:defRPr>
             </a:pPr>
             <a:r>
+              <a:rPr lang="en-US" noProof="0" dirty="0"/>
               <a:t>M2S2L</a:t>
             </a:r>
           </a:p>
@@ -8946,6 +9545,7 @@
               </a:defRPr>
             </a:pPr>
             <a:r>
+              <a:rPr lang="en-US" noProof="0" dirty="0"/>
               <a:t>M2S2L extends Mamba-based VAD through explicit multi-scale learning.</a:t>
             </a:r>
           </a:p>
@@ -8962,6 +9562,7 @@
               </a:defRPr>
             </a:pPr>
             <a:r>
+              <a:rPr lang="en-US" noProof="0" dirty="0"/>
               <a:t>Spatial scales capture small local changes, medium patterns, and larger scene structure.</a:t>
             </a:r>
           </a:p>
@@ -8978,6 +9579,7 @@
               </a:defRPr>
             </a:pPr>
             <a:r>
+              <a:rPr lang="en-US" noProof="0" dirty="0"/>
               <a:t>Temporal scales capture short motion, medium dynamics, and long behavior.</a:t>
             </a:r>
           </a:p>
@@ -8994,6 +9596,7 @@
               </a:defRPr>
             </a:pPr>
             <a:r>
+              <a:rPr lang="en-US" noProof="0" dirty="0"/>
               <a:t>Feature decomposition separates common, appearance-specific, and motion-specific representations.</a:t>
             </a:r>
           </a:p>
@@ -9043,7 +9646,7 @@
           <a:lstStyle/>
           <a:p>
             <a:pPr algn="ctr"/>
-            <a:endParaRPr/>
+            <a:endParaRPr lang="en-US" noProof="0" dirty="0"/>
           </a:p>
         </p:txBody>
       </p:sp>
@@ -9091,7 +9694,7 @@
           <a:lstStyle/>
           <a:p>
             <a:pPr algn="ctr"/>
-            <a:endParaRPr/>
+            <a:endParaRPr lang="en-US" noProof="0" dirty="0"/>
           </a:p>
         </p:txBody>
       </p:sp>
@@ -9139,7 +9742,7 @@
           <a:lstStyle/>
           <a:p>
             <a:pPr algn="ctr"/>
-            <a:endParaRPr/>
+            <a:endParaRPr lang="en-US" noProof="0" dirty="0"/>
           </a:p>
         </p:txBody>
       </p:sp>
@@ -9174,6 +9777,7 @@
               </a:defRPr>
             </a:pPr>
             <a:r>
+              <a:rPr lang="en-US" noProof="0" dirty="0"/>
               <a:t>Multi-scale spatial</a:t>
             </a:r>
           </a:p>
@@ -9210,6 +9814,7 @@
               </a:defRPr>
             </a:pPr>
             <a:r>
+              <a:rPr lang="en-US" noProof="0" dirty="0"/>
               <a:t>Multi-scale temporal</a:t>
             </a:r>
           </a:p>
@@ -9246,6 +9851,7 @@
               </a:defRPr>
             </a:pPr>
             <a:r>
+              <a:rPr lang="en-US" noProof="0" dirty="0"/>
               <a:t>Feature decomposition</a:t>
             </a:r>
           </a:p>
@@ -9577,4 +10183,299 @@
   </a:objectDefaults>
   <a:extraClrSchemeLst/>
 </a:theme>
+</file>
+
+<file path=ppt/theme/theme2.xml><?xml version="1.0" encoding="utf-8"?>
+<a:theme xmlns:a="http://schemas.openxmlformats.org/drawingml/2006/main" name="Tema de Office">
+  <a:themeElements>
+    <a:clrScheme name="Office">
+      <a:dk1>
+        <a:sysClr val="windowText" lastClr="000000"/>
+      </a:dk1>
+      <a:lt1>
+        <a:sysClr val="window" lastClr="FFFFFF"/>
+      </a:lt1>
+      <a:dk2>
+        <a:srgbClr val="44546A"/>
+      </a:dk2>
+      <a:lt2>
+        <a:srgbClr val="E7E6E6"/>
+      </a:lt2>
+      <a:accent1>
+        <a:srgbClr val="4472C4"/>
+      </a:accent1>
+      <a:accent2>
+        <a:srgbClr val="ED7D31"/>
+      </a:accent2>
+      <a:accent3>
+        <a:srgbClr val="A5A5A5"/>
+      </a:accent3>
+      <a:accent4>
+        <a:srgbClr val="FFC000"/>
+      </a:accent4>
+      <a:accent5>
+        <a:srgbClr val="5B9BD5"/>
+      </a:accent5>
+      <a:accent6>
+        <a:srgbClr val="70AD47"/>
+      </a:accent6>
+      <a:hlink>
+        <a:srgbClr val="0563C1"/>
+      </a:hlink>
+      <a:folHlink>
+        <a:srgbClr val="954F72"/>
+      </a:folHlink>
+    </a:clrScheme>
+    <a:fontScheme name="Office">
+      <a:majorFont>
+        <a:latin typeface="游ゴシック Light" panose="020F0302020204030204"/>
+        <a:ea typeface=""/>
+        <a:cs typeface=""/>
+        <a:font script="Jpan" typeface="游ゴシック Light"/>
+        <a:font script="Hang" typeface="맑은 고딕"/>
+        <a:font script="Hans" typeface="等线 Light"/>
+        <a:font script="Hant" typeface="新細明體"/>
+        <a:font script="Arab" typeface="Times New Roman"/>
+        <a:font script="Hebr" typeface="Times New Roman"/>
+        <a:font script="Thai" typeface="Angsana New"/>
+        <a:font script="Ethi" typeface="Nyala"/>
+        <a:font script="Beng" typeface="Vrinda"/>
+        <a:font script="Gujr" typeface="Shruti"/>
+        <a:font script="Khmr" typeface="MoolBoran"/>
+        <a:font script="Knda" typeface="Tunga"/>
+        <a:font script="Guru" typeface="Raavi"/>
+        <a:font script="Cans" typeface="Euphemia"/>
+        <a:font script="Cher" typeface="Plantagenet Cherokee"/>
+        <a:font script="Yiii" typeface="Microsoft Yi Baiti"/>
+        <a:font script="Tibt" typeface="Microsoft Himalaya"/>
+        <a:font script="Thaa" typeface="MV Boli"/>
+        <a:font script="Deva" typeface="Mangal"/>
+        <a:font script="Telu" typeface="Gautami"/>
+        <a:font script="Taml" typeface="Latha"/>
+        <a:font script="Syrc" typeface="Estrangelo Edessa"/>
+        <a:font script="Orya" typeface="Kalinga"/>
+        <a:font script="Mlym" typeface="Kartika"/>
+        <a:font script="Laoo" typeface="DokChampa"/>
+        <a:font script="Sinh" typeface="Iskoola Pota"/>
+        <a:font script="Mong" typeface="Mongolian Baiti"/>
+        <a:font script="Viet" typeface="Times New Roman"/>
+        <a:font script="Uigh" typeface="Microsoft Uighur"/>
+        <a:font script="Geor" typeface="Sylfaen"/>
+        <a:font script="Armn" typeface="Arial"/>
+        <a:font script="Bugi" typeface="Leelawadee UI"/>
+        <a:font script="Bopo" typeface="Microsoft JhengHei"/>
+        <a:font script="Java" typeface="Javanese Text"/>
+        <a:font script="Lisu" typeface="Segoe UI"/>
+        <a:font script="Mymr" typeface="Myanmar Text"/>
+        <a:font script="Nkoo" typeface="Ebrima"/>
+        <a:font script="Olck" typeface="Nirmala UI"/>
+        <a:font script="Osma" typeface="Ebrima"/>
+        <a:font script="Phag" typeface="Phagspa"/>
+        <a:font script="Syrn" typeface="Estrangelo Edessa"/>
+        <a:font script="Syrj" typeface="Estrangelo Edessa"/>
+        <a:font script="Syre" typeface="Estrangelo Edessa"/>
+        <a:font script="Sora" typeface="Nirmala UI"/>
+        <a:font script="Tale" typeface="Microsoft Tai Le"/>
+        <a:font script="Talu" typeface="Microsoft New Tai Lue"/>
+        <a:font script="Tfng" typeface="Ebrima"/>
+      </a:majorFont>
+      <a:minorFont>
+        <a:latin typeface="游ゴシック" panose="020F0502020204030204"/>
+        <a:ea typeface=""/>
+        <a:cs typeface=""/>
+        <a:font script="Jpan" typeface="游ゴシック"/>
+        <a:font script="Hang" typeface="맑은 고딕"/>
+        <a:font script="Hans" typeface="等线"/>
+        <a:font script="Hant" typeface="新細明體"/>
+        <a:font script="Arab" typeface="Arial"/>
+        <a:font script="Hebr" typeface="Arial"/>
+        <a:font script="Thai" typeface="Cordia New"/>
+        <a:font script="Ethi" typeface="Nyala"/>
+        <a:font script="Beng" typeface="Vrinda"/>
+        <a:font script="Gujr" typeface="Shruti"/>
+        <a:font script="Khmr" typeface="DaunPenh"/>
+        <a:font script="Knda" typeface="Tunga"/>
+        <a:font script="Guru" typeface="Raavi"/>
+        <a:font script="Cans" typeface="Euphemia"/>
+        <a:font script="Cher" typeface="Plantagenet Cherokee"/>
+        <a:font script="Yiii" typeface="Microsoft Yi Baiti"/>
+        <a:font script="Tibt" typeface="Microsoft Himalaya"/>
+        <a:font script="Thaa" typeface="MV Boli"/>
+        <a:font script="Deva" typeface="Mangal"/>
+        <a:font script="Telu" typeface="Gautami"/>
+        <a:font script="Taml" typeface="Latha"/>
+        <a:font script="Syrc" typeface="Estrangelo Edessa"/>
+        <a:font script="Orya" typeface="Kalinga"/>
+        <a:font script="Mlym" typeface="Kartika"/>
+        <a:font script="Laoo" typeface="DokChampa"/>
+        <a:font script="Sinh" typeface="Iskoola Pota"/>
+        <a:font script="Mong" typeface="Mongolian Baiti"/>
+        <a:font script="Viet" typeface="Arial"/>
+        <a:font script="Uigh" typeface="Microsoft Uighur"/>
+        <a:font script="Geor" typeface="Sylfaen"/>
+        <a:font script="Armn" typeface="Arial"/>
+        <a:font script="Bugi" typeface="Leelawadee UI"/>
+        <a:font script="Bopo" typeface="Microsoft JhengHei"/>
+        <a:font script="Java" typeface="Javanese Text"/>
+        <a:font script="Lisu" typeface="Segoe UI"/>
+        <a:font script="Mymr" typeface="Myanmar Text"/>
+        <a:font script="Nkoo" typeface="Ebrima"/>
+        <a:font script="Olck" typeface="Nirmala UI"/>
+        <a:font script="Osma" typeface="Ebrima"/>
+        <a:font script="Phag" typeface="Phagspa"/>
+        <a:font script="Syrn" typeface="Estrangelo Edessa"/>
+        <a:font script="Syrj" typeface="Estrangelo Edessa"/>
+        <a:font script="Syre" typeface="Estrangelo Edessa"/>
+        <a:font script="Sora" typeface="Nirmala UI"/>
+        <a:font script="Tale" typeface="Microsoft Tai Le"/>
+        <a:font script="Talu" typeface="Microsoft New Tai Lue"/>
+        <a:font script="Tfng" typeface="Ebrima"/>
+      </a:minorFont>
+    </a:fontScheme>
+    <a:fmtScheme name="Office">
+      <a:fillStyleLst>
+        <a:solidFill>
+          <a:schemeClr val="phClr"/>
+        </a:solidFill>
+        <a:gradFill rotWithShape="1">
+          <a:gsLst>
+            <a:gs pos="0">
+              <a:schemeClr val="phClr">
+                <a:lumMod val="110000"/>
+                <a:satMod val="105000"/>
+                <a:tint val="67000"/>
+              </a:schemeClr>
+            </a:gs>
+            <a:gs pos="50000">
+              <a:schemeClr val="phClr">
+                <a:lumMod val="105000"/>
+                <a:satMod val="103000"/>
+                <a:tint val="73000"/>
+              </a:schemeClr>
+            </a:gs>
+            <a:gs pos="100000">
+              <a:schemeClr val="phClr">
+                <a:lumMod val="105000"/>
+                <a:satMod val="109000"/>
+                <a:tint val="81000"/>
+              </a:schemeClr>
+            </a:gs>
+          </a:gsLst>
+          <a:lin ang="5400000" scaled="0"/>
+        </a:gradFill>
+        <a:gradFill rotWithShape="1">
+          <a:gsLst>
+            <a:gs pos="0">
+              <a:schemeClr val="phClr">
+                <a:satMod val="103000"/>
+                <a:lumMod val="102000"/>
+                <a:tint val="94000"/>
+              </a:schemeClr>
+            </a:gs>
+            <a:gs pos="50000">
+              <a:schemeClr val="phClr">
+                <a:satMod val="110000"/>
+                <a:lumMod val="100000"/>
+                <a:shade val="100000"/>
+              </a:schemeClr>
+            </a:gs>
+            <a:gs pos="100000">
+              <a:schemeClr val="phClr">
+                <a:lumMod val="99000"/>
+                <a:satMod val="120000"/>
+                <a:shade val="78000"/>
+              </a:schemeClr>
+            </a:gs>
+          </a:gsLst>
+          <a:lin ang="5400000" scaled="0"/>
+        </a:gradFill>
+      </a:fillStyleLst>
+      <a:lnStyleLst>
+        <a:ln w="6350" cap="flat" cmpd="sng" algn="ctr">
+          <a:solidFill>
+            <a:schemeClr val="phClr"/>
+          </a:solidFill>
+          <a:prstDash val="solid"/>
+          <a:miter lim="800000"/>
+        </a:ln>
+        <a:ln w="12700" cap="flat" cmpd="sng" algn="ctr">
+          <a:solidFill>
+            <a:schemeClr val="phClr"/>
+          </a:solidFill>
+          <a:prstDash val="solid"/>
+          <a:miter lim="800000"/>
+        </a:ln>
+        <a:ln w="19050" cap="flat" cmpd="sng" algn="ctr">
+          <a:solidFill>
+            <a:schemeClr val="phClr"/>
+          </a:solidFill>
+          <a:prstDash val="solid"/>
+          <a:miter lim="800000"/>
+        </a:ln>
+      </a:lnStyleLst>
+      <a:effectStyleLst>
+        <a:effectStyle>
+          <a:effectLst/>
+        </a:effectStyle>
+        <a:effectStyle>
+          <a:effectLst/>
+        </a:effectStyle>
+        <a:effectStyle>
+          <a:effectLst>
+            <a:outerShdw blurRad="57150" dist="19050" dir="5400000" algn="ctr" rotWithShape="0">
+              <a:srgbClr val="000000">
+                <a:alpha val="63000"/>
+              </a:srgbClr>
+            </a:outerShdw>
+          </a:effectLst>
+        </a:effectStyle>
+      </a:effectStyleLst>
+      <a:bgFillStyleLst>
+        <a:solidFill>
+          <a:schemeClr val="phClr"/>
+        </a:solidFill>
+        <a:solidFill>
+          <a:schemeClr val="phClr">
+            <a:tint val="95000"/>
+            <a:satMod val="170000"/>
+          </a:schemeClr>
+        </a:solidFill>
+        <a:gradFill rotWithShape="1">
+          <a:gsLst>
+            <a:gs pos="0">
+              <a:schemeClr val="phClr">
+                <a:tint val="93000"/>
+                <a:satMod val="150000"/>
+                <a:shade val="98000"/>
+                <a:lumMod val="102000"/>
+              </a:schemeClr>
+            </a:gs>
+            <a:gs pos="50000">
+              <a:schemeClr val="phClr">
+                <a:tint val="98000"/>
+                <a:satMod val="130000"/>
+                <a:shade val="90000"/>
+                <a:lumMod val="103000"/>
+              </a:schemeClr>
+            </a:gs>
+            <a:gs pos="100000">
+              <a:schemeClr val="phClr">
+                <a:shade val="63000"/>
+                <a:satMod val="120000"/>
+              </a:schemeClr>
+            </a:gs>
+          </a:gsLst>
+          <a:lin ang="5400000" scaled="0"/>
+        </a:gradFill>
+      </a:bgFillStyleLst>
+    </a:fmtScheme>
+  </a:themeElements>
+  <a:objectDefaults/>
+  <a:extraClrSchemeLst/>
+  <a:extLst>
+    <a:ext uri="{05A4C25C-085E-4340-85A3-A5531E510DB2}">
+      <thm15:themeFamily xmlns:thm15="http://schemas.microsoft.com/office/thememl/2012/main" name="Office Theme" id="{62F939B6-93AF-4DB8-9C6B-D6C7DFDC589F}" vid="{4A3C46E8-61CC-4603-A589-7422A47A8E4A}"/>
+    </a:ext>
+  </a:extLst>
+</a:theme>
 </file>